--- a/reports/presentation.pptx
+++ b/reports/presentation.pptx
@@ -4,17 +4,20 @@
   <p:sldMasterIdLst>
     <p:sldMasterId id="2147483648" r:id="rId1"/>
   </p:sldMasterIdLst>
+  <p:notesMasterIdLst>
+    <p:notesMasterId r:id="rId10"/>
+  </p:notesMasterIdLst>
   <p:sldIdLst>
-    <p:sldId id="256" r:id="rId7"/>
-    <p:sldId id="257" r:id="rId8"/>
-    <p:sldId id="258" r:id="rId9"/>
-    <p:sldId id="259" r:id="rId10"/>
-    <p:sldId id="260" r:id="rId11"/>
-    <p:sldId id="261" r:id="rId12"/>
-    <p:sldId id="262" r:id="rId13"/>
-    <p:sldId id="263" r:id="rId14"/>
+    <p:sldId id="256" r:id="rId2"/>
+    <p:sldId id="257" r:id="rId3"/>
+    <p:sldId id="258" r:id="rId4"/>
+    <p:sldId id="259" r:id="rId5"/>
+    <p:sldId id="260" r:id="rId6"/>
+    <p:sldId id="261" r:id="rId7"/>
+    <p:sldId id="262" r:id="rId8"/>
+    <p:sldId id="263" r:id="rId9"/>
   </p:sldIdLst>
-  <p:sldSz cx="12191695" cy="6858000" type="screen4x3"/>
+  <p:sldSz cx="12192000" cy="6858000"/>
   <p:notesSz cx="6858000" cy="9144000"/>
   <p:defaultTextStyle>
     <a:defPPr>
@@ -111,7 +114,457 @@
       </a:defRPr>
     </a:lvl9pPr>
   </p:defaultTextStyle>
+  <p:extLst>
+    <p:ext uri="{EFAFB233-063F-42B5-8137-9DF3F51BA10A}">
+      <p15:sldGuideLst xmlns:p15="http://schemas.microsoft.com/office/powerpoint/2012/main">
+        <p15:guide id="1" orient="horz" pos="2160">
+          <p15:clr>
+            <a:srgbClr val="A4A3A4"/>
+          </p15:clr>
+        </p15:guide>
+        <p15:guide id="2" pos="2880">
+          <p15:clr>
+            <a:srgbClr val="A4A3A4"/>
+          </p15:clr>
+        </p15:guide>
+      </p15:sldGuideLst>
+    </p:ext>
+  </p:extLst>
 </p:presentation>
+</file>
+
+<file path=ppt/notesMasters/notesMaster1.xml><?xml version="1.0" encoding="utf-8"?>
+<p:notesMaster xmlns:a="http://schemas.openxmlformats.org/drawingml/2006/main" xmlns:r="http://schemas.openxmlformats.org/officeDocument/2006/relationships" xmlns:p="http://schemas.openxmlformats.org/presentationml/2006/main">
+  <p:cSld>
+    <p:bg>
+      <p:bgRef idx="1001">
+        <a:schemeClr val="bg1"/>
+      </p:bgRef>
+    </p:bg>
+    <p:spTree>
+      <p:nvGrpSpPr>
+        <p:cNvPr id="1" name=""/>
+        <p:cNvGrpSpPr/>
+        <p:nvPr/>
+      </p:nvGrpSpPr>
+      <p:grpSpPr>
+        <a:xfrm>
+          <a:off x="0" y="0"/>
+          <a:ext cx="0" cy="0"/>
+          <a:chOff x="0" y="0"/>
+          <a:chExt cx="0" cy="0"/>
+        </a:xfrm>
+      </p:grpSpPr>
+      <p:sp>
+        <p:nvSpPr>
+          <p:cNvPr id="2" name="Header Placeholder 1"/>
+          <p:cNvSpPr>
+            <a:spLocks noGrp="1"/>
+          </p:cNvSpPr>
+          <p:nvPr>
+            <p:ph type="hdr" sz="quarter"/>
+          </p:nvPr>
+        </p:nvSpPr>
+        <p:spPr>
+          <a:xfrm>
+            <a:off x="0" y="0"/>
+            <a:ext cx="2971800" cy="458788"/>
+          </a:xfrm>
+          <a:prstGeom prst="rect">
+            <a:avLst/>
+          </a:prstGeom>
+        </p:spPr>
+        <p:txBody>
+          <a:bodyPr vert="horz" lIns="91440" tIns="45720" rIns="91440" bIns="45720" rtlCol="0"/>
+          <a:lstStyle>
+            <a:lvl1pPr algn="l">
+              <a:defRPr sz="1200"/>
+            </a:lvl1pPr>
+          </a:lstStyle>
+          <a:p>
+            <a:endParaRPr lang="en-IN"/>
+          </a:p>
+        </p:txBody>
+      </p:sp>
+      <p:sp>
+        <p:nvSpPr>
+          <p:cNvPr id="3" name="Date Placeholder 2"/>
+          <p:cNvSpPr>
+            <a:spLocks noGrp="1"/>
+          </p:cNvSpPr>
+          <p:nvPr>
+            <p:ph type="dt" idx="1"/>
+          </p:nvPr>
+        </p:nvSpPr>
+        <p:spPr>
+          <a:xfrm>
+            <a:off x="3884613" y="0"/>
+            <a:ext cx="2971800" cy="458788"/>
+          </a:xfrm>
+          <a:prstGeom prst="rect">
+            <a:avLst/>
+          </a:prstGeom>
+        </p:spPr>
+        <p:txBody>
+          <a:bodyPr vert="horz" lIns="91440" tIns="45720" rIns="91440" bIns="45720" rtlCol="0"/>
+          <a:lstStyle>
+            <a:lvl1pPr algn="r">
+              <a:defRPr sz="1200"/>
+            </a:lvl1pPr>
+          </a:lstStyle>
+          <a:p>
+            <a:fld id="{FA11E6C7-61B4-4905-80D3-7975661D36A1}" type="datetimeFigureOut">
+              <a:rPr lang="en-IN" smtClean="0"/>
+              <a:t>12-06-2026</a:t>
+            </a:fld>
+            <a:endParaRPr lang="en-IN"/>
+          </a:p>
+        </p:txBody>
+      </p:sp>
+      <p:sp>
+        <p:nvSpPr>
+          <p:cNvPr id="4" name="Slide Image Placeholder 3"/>
+          <p:cNvSpPr>
+            <a:spLocks noGrp="1" noRot="1" noChangeAspect="1"/>
+          </p:cNvSpPr>
+          <p:nvPr>
+            <p:ph type="sldImg" idx="2"/>
+          </p:nvPr>
+        </p:nvSpPr>
+        <p:spPr>
+          <a:xfrm>
+            <a:off x="685800" y="1143000"/>
+            <a:ext cx="5486400" cy="3086100"/>
+          </a:xfrm>
+          <a:prstGeom prst="rect">
+            <a:avLst/>
+          </a:prstGeom>
+          <a:noFill/>
+          <a:ln w="12700">
+            <a:solidFill>
+              <a:prstClr val="black"/>
+            </a:solidFill>
+          </a:ln>
+        </p:spPr>
+        <p:txBody>
+          <a:bodyPr vert="horz" lIns="91440" tIns="45720" rIns="91440" bIns="45720" rtlCol="0" anchor="ctr"/>
+          <a:lstStyle/>
+          <a:p>
+            <a:endParaRPr lang="en-IN"/>
+          </a:p>
+        </p:txBody>
+      </p:sp>
+      <p:sp>
+        <p:nvSpPr>
+          <p:cNvPr id="5" name="Notes Placeholder 4"/>
+          <p:cNvSpPr>
+            <a:spLocks noGrp="1"/>
+          </p:cNvSpPr>
+          <p:nvPr>
+            <p:ph type="body" sz="quarter" idx="3"/>
+          </p:nvPr>
+        </p:nvSpPr>
+        <p:spPr>
+          <a:xfrm>
+            <a:off x="685800" y="4400550"/>
+            <a:ext cx="5486400" cy="3600450"/>
+          </a:xfrm>
+          <a:prstGeom prst="rect">
+            <a:avLst/>
+          </a:prstGeom>
+        </p:spPr>
+        <p:txBody>
+          <a:bodyPr vert="horz" lIns="91440" tIns="45720" rIns="91440" bIns="45720" rtlCol="0"/>
+          <a:lstStyle/>
+          <a:p>
+            <a:pPr lvl="0"/>
+            <a:r>
+              <a:rPr lang="en-US" smtClean="0"/>
+              <a:t>Click to edit Master text styles</a:t>
+            </a:r>
+          </a:p>
+          <a:p>
+            <a:pPr lvl="1"/>
+            <a:r>
+              <a:rPr lang="en-US" smtClean="0"/>
+              <a:t>Second level</a:t>
+            </a:r>
+          </a:p>
+          <a:p>
+            <a:pPr lvl="2"/>
+            <a:r>
+              <a:rPr lang="en-US" smtClean="0"/>
+              <a:t>Third level</a:t>
+            </a:r>
+          </a:p>
+          <a:p>
+            <a:pPr lvl="3"/>
+            <a:r>
+              <a:rPr lang="en-US" smtClean="0"/>
+              <a:t>Fourth level</a:t>
+            </a:r>
+          </a:p>
+          <a:p>
+            <a:pPr lvl="4"/>
+            <a:r>
+              <a:rPr lang="en-US" smtClean="0"/>
+              <a:t>Fifth level</a:t>
+            </a:r>
+            <a:endParaRPr lang="en-IN"/>
+          </a:p>
+        </p:txBody>
+      </p:sp>
+      <p:sp>
+        <p:nvSpPr>
+          <p:cNvPr id="6" name="Footer Placeholder 5"/>
+          <p:cNvSpPr>
+            <a:spLocks noGrp="1"/>
+          </p:cNvSpPr>
+          <p:nvPr>
+            <p:ph type="ftr" sz="quarter" idx="4"/>
+          </p:nvPr>
+        </p:nvSpPr>
+        <p:spPr>
+          <a:xfrm>
+            <a:off x="0" y="8685213"/>
+            <a:ext cx="2971800" cy="458787"/>
+          </a:xfrm>
+          <a:prstGeom prst="rect">
+            <a:avLst/>
+          </a:prstGeom>
+        </p:spPr>
+        <p:txBody>
+          <a:bodyPr vert="horz" lIns="91440" tIns="45720" rIns="91440" bIns="45720" rtlCol="0" anchor="b"/>
+          <a:lstStyle>
+            <a:lvl1pPr algn="l">
+              <a:defRPr sz="1200"/>
+            </a:lvl1pPr>
+          </a:lstStyle>
+          <a:p>
+            <a:endParaRPr lang="en-IN"/>
+          </a:p>
+        </p:txBody>
+      </p:sp>
+      <p:sp>
+        <p:nvSpPr>
+          <p:cNvPr id="7" name="Slide Number Placeholder 6"/>
+          <p:cNvSpPr>
+            <a:spLocks noGrp="1"/>
+          </p:cNvSpPr>
+          <p:nvPr>
+            <p:ph type="sldNum" sz="quarter" idx="5"/>
+          </p:nvPr>
+        </p:nvSpPr>
+        <p:spPr>
+          <a:xfrm>
+            <a:off x="3884613" y="8685213"/>
+            <a:ext cx="2971800" cy="458787"/>
+          </a:xfrm>
+          <a:prstGeom prst="rect">
+            <a:avLst/>
+          </a:prstGeom>
+        </p:spPr>
+        <p:txBody>
+          <a:bodyPr vert="horz" lIns="91440" tIns="45720" rIns="91440" bIns="45720" rtlCol="0" anchor="b"/>
+          <a:lstStyle>
+            <a:lvl1pPr algn="r">
+              <a:defRPr sz="1200"/>
+            </a:lvl1pPr>
+          </a:lstStyle>
+          <a:p>
+            <a:fld id="{2E6A37F1-8B7F-47A1-8B3A-5AB27C5CED98}" type="slidenum">
+              <a:rPr lang="en-IN" smtClean="0"/>
+              <a:t>‹#›</a:t>
+            </a:fld>
+            <a:endParaRPr lang="en-IN"/>
+          </a:p>
+        </p:txBody>
+      </p:sp>
+    </p:spTree>
+    <p:extLst>
+      <p:ext uri="{BB962C8B-B14F-4D97-AF65-F5344CB8AC3E}">
+        <p14:creationId xmlns:p14="http://schemas.microsoft.com/office/powerpoint/2010/main" val="891801991"/>
+      </p:ext>
+    </p:extLst>
+  </p:cSld>
+  <p:clrMap bg1="lt1" tx1="dk1" bg2="lt2" tx2="dk2" accent1="accent1" accent2="accent2" accent3="accent3" accent4="accent4" accent5="accent5" accent6="accent6" hlink="hlink" folHlink="folHlink"/>
+  <p:notesStyle>
+    <a:lvl1pPr marL="0" algn="l" defTabSz="914400" rtl="0" eaLnBrk="1" latinLnBrk="0" hangingPunct="1">
+      <a:defRPr sz="1200" kern="1200">
+        <a:solidFill>
+          <a:schemeClr val="tx1"/>
+        </a:solidFill>
+        <a:latin typeface="+mn-lt"/>
+        <a:ea typeface="+mn-ea"/>
+        <a:cs typeface="+mn-cs"/>
+      </a:defRPr>
+    </a:lvl1pPr>
+    <a:lvl2pPr marL="457200" algn="l" defTabSz="914400" rtl="0" eaLnBrk="1" latinLnBrk="0" hangingPunct="1">
+      <a:defRPr sz="1200" kern="1200">
+        <a:solidFill>
+          <a:schemeClr val="tx1"/>
+        </a:solidFill>
+        <a:latin typeface="+mn-lt"/>
+        <a:ea typeface="+mn-ea"/>
+        <a:cs typeface="+mn-cs"/>
+      </a:defRPr>
+    </a:lvl2pPr>
+    <a:lvl3pPr marL="914400" algn="l" defTabSz="914400" rtl="0" eaLnBrk="1" latinLnBrk="0" hangingPunct="1">
+      <a:defRPr sz="1200" kern="1200">
+        <a:solidFill>
+          <a:schemeClr val="tx1"/>
+        </a:solidFill>
+        <a:latin typeface="+mn-lt"/>
+        <a:ea typeface="+mn-ea"/>
+        <a:cs typeface="+mn-cs"/>
+      </a:defRPr>
+    </a:lvl3pPr>
+    <a:lvl4pPr marL="1371600" algn="l" defTabSz="914400" rtl="0" eaLnBrk="1" latinLnBrk="0" hangingPunct="1">
+      <a:defRPr sz="1200" kern="1200">
+        <a:solidFill>
+          <a:schemeClr val="tx1"/>
+        </a:solidFill>
+        <a:latin typeface="+mn-lt"/>
+        <a:ea typeface="+mn-ea"/>
+        <a:cs typeface="+mn-cs"/>
+      </a:defRPr>
+    </a:lvl4pPr>
+    <a:lvl5pPr marL="1828800" algn="l" defTabSz="914400" rtl="0" eaLnBrk="1" latinLnBrk="0" hangingPunct="1">
+      <a:defRPr sz="1200" kern="1200">
+        <a:solidFill>
+          <a:schemeClr val="tx1"/>
+        </a:solidFill>
+        <a:latin typeface="+mn-lt"/>
+        <a:ea typeface="+mn-ea"/>
+        <a:cs typeface="+mn-cs"/>
+      </a:defRPr>
+    </a:lvl5pPr>
+    <a:lvl6pPr marL="2286000" algn="l" defTabSz="914400" rtl="0" eaLnBrk="1" latinLnBrk="0" hangingPunct="1">
+      <a:defRPr sz="1200" kern="1200">
+        <a:solidFill>
+          <a:schemeClr val="tx1"/>
+        </a:solidFill>
+        <a:latin typeface="+mn-lt"/>
+        <a:ea typeface="+mn-ea"/>
+        <a:cs typeface="+mn-cs"/>
+      </a:defRPr>
+    </a:lvl6pPr>
+    <a:lvl7pPr marL="2743200" algn="l" defTabSz="914400" rtl="0" eaLnBrk="1" latinLnBrk="0" hangingPunct="1">
+      <a:defRPr sz="1200" kern="1200">
+        <a:solidFill>
+          <a:schemeClr val="tx1"/>
+        </a:solidFill>
+        <a:latin typeface="+mn-lt"/>
+        <a:ea typeface="+mn-ea"/>
+        <a:cs typeface="+mn-cs"/>
+      </a:defRPr>
+    </a:lvl7pPr>
+    <a:lvl8pPr marL="3200400" algn="l" defTabSz="914400" rtl="0" eaLnBrk="1" latinLnBrk="0" hangingPunct="1">
+      <a:defRPr sz="1200" kern="1200">
+        <a:solidFill>
+          <a:schemeClr val="tx1"/>
+        </a:solidFill>
+        <a:latin typeface="+mn-lt"/>
+        <a:ea typeface="+mn-ea"/>
+        <a:cs typeface="+mn-cs"/>
+      </a:defRPr>
+    </a:lvl8pPr>
+    <a:lvl9pPr marL="3657600" algn="l" defTabSz="914400" rtl="0" eaLnBrk="1" latinLnBrk="0" hangingPunct="1">
+      <a:defRPr sz="1200" kern="1200">
+        <a:solidFill>
+          <a:schemeClr val="tx1"/>
+        </a:solidFill>
+        <a:latin typeface="+mn-lt"/>
+        <a:ea typeface="+mn-ea"/>
+        <a:cs typeface="+mn-cs"/>
+      </a:defRPr>
+    </a:lvl9pPr>
+  </p:notesStyle>
+</p:notesMaster>
+</file>
+
+<file path=ppt/notesSlides/notesSlide1.xml><?xml version="1.0" encoding="utf-8"?>
+<p:notes xmlns:a="http://schemas.openxmlformats.org/drawingml/2006/main" xmlns:r="http://schemas.openxmlformats.org/officeDocument/2006/relationships" xmlns:p="http://schemas.openxmlformats.org/presentationml/2006/main">
+  <p:cSld>
+    <p:spTree>
+      <p:nvGrpSpPr>
+        <p:cNvPr id="1" name=""/>
+        <p:cNvGrpSpPr/>
+        <p:nvPr/>
+      </p:nvGrpSpPr>
+      <p:grpSpPr>
+        <a:xfrm>
+          <a:off x="0" y="0"/>
+          <a:ext cx="0" cy="0"/>
+          <a:chOff x="0" y="0"/>
+          <a:chExt cx="0" cy="0"/>
+        </a:xfrm>
+      </p:grpSpPr>
+      <p:sp>
+        <p:nvSpPr>
+          <p:cNvPr id="2" name="Slide Image Placeholder 1"/>
+          <p:cNvSpPr>
+            <a:spLocks noGrp="1" noRot="1" noChangeAspect="1"/>
+          </p:cNvSpPr>
+          <p:nvPr>
+            <p:ph type="sldImg"/>
+          </p:nvPr>
+        </p:nvSpPr>
+        <p:spPr/>
+      </p:sp>
+      <p:sp>
+        <p:nvSpPr>
+          <p:cNvPr id="3" name="Notes Placeholder 2"/>
+          <p:cNvSpPr>
+            <a:spLocks noGrp="1"/>
+          </p:cNvSpPr>
+          <p:nvPr>
+            <p:ph type="body" idx="1"/>
+          </p:nvPr>
+        </p:nvSpPr>
+        <p:spPr/>
+        <p:txBody>
+          <a:bodyPr/>
+          <a:lstStyle/>
+          <a:p>
+            <a:endParaRPr lang="en-IN" dirty="0"/>
+          </a:p>
+        </p:txBody>
+      </p:sp>
+      <p:sp>
+        <p:nvSpPr>
+          <p:cNvPr id="4" name="Slide Number Placeholder 3"/>
+          <p:cNvSpPr>
+            <a:spLocks noGrp="1"/>
+          </p:cNvSpPr>
+          <p:nvPr>
+            <p:ph type="sldNum" sz="quarter" idx="10"/>
+          </p:nvPr>
+        </p:nvSpPr>
+        <p:spPr/>
+        <p:txBody>
+          <a:bodyPr/>
+          <a:lstStyle/>
+          <a:p>
+            <a:fld id="{2E6A37F1-8B7F-47A1-8B3A-5AB27C5CED98}" type="slidenum">
+              <a:rPr lang="en-IN" smtClean="0"/>
+              <a:t>1</a:t>
+            </a:fld>
+            <a:endParaRPr lang="en-IN"/>
+          </a:p>
+        </p:txBody>
+      </p:sp>
+    </p:spTree>
+    <p:extLst>
+      <p:ext uri="{BB962C8B-B14F-4D97-AF65-F5344CB8AC3E}">
+        <p14:creationId xmlns:p14="http://schemas.microsoft.com/office/powerpoint/2010/main" val="797359756"/>
+      </p:ext>
+    </p:extLst>
+  </p:cSld>
+  <p:clrMapOvr>
+    <a:masterClrMapping/>
+  </p:clrMapOvr>
+</p:notes>
 </file>
 
 <file path=ppt/slideLayouts/slideLayout1.xml><?xml version="1.0" encoding="utf-8"?>
@@ -295,7 +748,7 @@
           <a:p>
             <a:fld id="{5BCAD085-E8A6-8845-BD4E-CB4CCA059FC4}" type="datetimeFigureOut">
               <a:rPr lang="en-US" smtClean="0"/>
-              <a:t>1/27/13</a:t>
+              <a:t>6/12/2026</a:t>
             </a:fld>
             <a:endParaRPr lang="en-US"/>
           </a:p>
@@ -465,7 +918,7 @@
           <a:p>
             <a:fld id="{5BCAD085-E8A6-8845-BD4E-CB4CCA059FC4}" type="datetimeFigureOut">
               <a:rPr lang="en-US" smtClean="0"/>
-              <a:t>1/27/13</a:t>
+              <a:t>6/12/2026</a:t>
             </a:fld>
             <a:endParaRPr lang="en-US"/>
           </a:p>
@@ -645,7 +1098,7 @@
           <a:p>
             <a:fld id="{5BCAD085-E8A6-8845-BD4E-CB4CCA059FC4}" type="datetimeFigureOut">
               <a:rPr lang="en-US" smtClean="0"/>
-              <a:t>1/27/13</a:t>
+              <a:t>6/12/2026</a:t>
             </a:fld>
             <a:endParaRPr lang="en-US"/>
           </a:p>
@@ -815,7 +1268,7 @@
           <a:p>
             <a:fld id="{5BCAD085-E8A6-8845-BD4E-CB4CCA059FC4}" type="datetimeFigureOut">
               <a:rPr lang="en-US" smtClean="0"/>
-              <a:t>1/27/13</a:t>
+              <a:t>6/12/2026</a:t>
             </a:fld>
             <a:endParaRPr lang="en-US"/>
           </a:p>
@@ -1061,7 +1514,7 @@
           <a:p>
             <a:fld id="{5BCAD085-E8A6-8845-BD4E-CB4CCA059FC4}" type="datetimeFigureOut">
               <a:rPr lang="en-US" smtClean="0"/>
-              <a:t>1/27/13</a:t>
+              <a:t>6/12/2026</a:t>
             </a:fld>
             <a:endParaRPr lang="en-US"/>
           </a:p>
@@ -1349,7 +1802,7 @@
           <a:p>
             <a:fld id="{5BCAD085-E8A6-8845-BD4E-CB4CCA059FC4}" type="datetimeFigureOut">
               <a:rPr lang="en-US" smtClean="0"/>
-              <a:t>1/27/13</a:t>
+              <a:t>6/12/2026</a:t>
             </a:fld>
             <a:endParaRPr lang="en-US"/>
           </a:p>
@@ -1771,7 +2224,7 @@
           <a:p>
             <a:fld id="{5BCAD085-E8A6-8845-BD4E-CB4CCA059FC4}" type="datetimeFigureOut">
               <a:rPr lang="en-US" smtClean="0"/>
-              <a:t>1/27/13</a:t>
+              <a:t>6/12/2026</a:t>
             </a:fld>
             <a:endParaRPr lang="en-US"/>
           </a:p>
@@ -1889,7 +2342,7 @@
           <a:p>
             <a:fld id="{5BCAD085-E8A6-8845-BD4E-CB4CCA059FC4}" type="datetimeFigureOut">
               <a:rPr lang="en-US" smtClean="0"/>
-              <a:t>1/27/13</a:t>
+              <a:t>6/12/2026</a:t>
             </a:fld>
             <a:endParaRPr lang="en-US"/>
           </a:p>
@@ -1984,7 +2437,7 @@
           <a:p>
             <a:fld id="{5BCAD085-E8A6-8845-BD4E-CB4CCA059FC4}" type="datetimeFigureOut">
               <a:rPr lang="en-US" smtClean="0"/>
-              <a:t>1/27/13</a:t>
+              <a:t>6/12/2026</a:t>
             </a:fld>
             <a:endParaRPr lang="en-US"/>
           </a:p>
@@ -2261,7 +2714,7 @@
           <a:p>
             <a:fld id="{5BCAD085-E8A6-8845-BD4E-CB4CCA059FC4}" type="datetimeFigureOut">
               <a:rPr lang="en-US" smtClean="0"/>
-              <a:t>1/27/13</a:t>
+              <a:t>6/12/2026</a:t>
             </a:fld>
             <a:endParaRPr lang="en-US"/>
           </a:p>
@@ -2514,7 +2967,7 @@
           <a:p>
             <a:fld id="{5BCAD085-E8A6-8845-BD4E-CB4CCA059FC4}" type="datetimeFigureOut">
               <a:rPr lang="en-US" smtClean="0"/>
-              <a:t>1/27/13</a:t>
+              <a:t>6/12/2026</a:t>
             </a:fld>
             <a:endParaRPr lang="en-US"/>
           </a:p>
@@ -2727,7 +3180,7 @@
           <a:p>
             <a:fld id="{5BCAD085-E8A6-8845-BD4E-CB4CCA059FC4}" type="datetimeFigureOut">
               <a:rPr lang="en-US" smtClean="0"/>
-              <a:t>1/27/13</a:t>
+              <a:t>6/12/2026</a:t>
             </a:fld>
             <a:endParaRPr lang="en-US"/>
           </a:p>
@@ -3086,7 +3539,7 @@
 </file>
 
 <file path=ppt/slides/slide1.xml><?xml version="1.0" encoding="utf-8"?>
-<p:sld xmlns:a="http://schemas.openxmlformats.org/drawingml/2006/main" xmlns:p="http://schemas.openxmlformats.org/presentationml/2006/main" xmlns:r="http://schemas.openxmlformats.org/officeDocument/2006/relationships">
+<p:sld xmlns:a="http://schemas.openxmlformats.org/drawingml/2006/main" xmlns:r="http://schemas.openxmlformats.org/officeDocument/2006/relationships" xmlns:p="http://schemas.openxmlformats.org/presentationml/2006/main">
   <p:cSld>
     <p:bg>
       <p:bgPr>
@@ -3102,7 +3555,14 @@
         <p:cNvGrpSpPr/>
         <p:nvPr/>
       </p:nvGrpSpPr>
-      <p:grpSpPr/>
+      <p:grpSpPr>
+        <a:xfrm>
+          <a:off x="0" y="0"/>
+          <a:ext cx="0" cy="0"/>
+          <a:chOff x="0" y="0"/>
+          <a:chExt cx="0" cy="0"/>
+        </a:xfrm>
+      </p:grpSpPr>
       <p:sp>
         <p:nvSpPr>
           <p:cNvPr id="2" name="TextBox 1"/>
@@ -3111,8 +3571,8 @@
         </p:nvSpPr>
         <p:spPr>
           <a:xfrm>
-            <a:off x="914400" y="2011680"/>
-            <a:ext cx="10332720" cy="1371600"/>
+            <a:off x="899377" y="5173227"/>
+            <a:ext cx="651856" cy="738664"/>
           </a:xfrm>
           <a:prstGeom prst="rect">
             <a:avLst/>
@@ -3134,8 +3594,10 @@
               </a:defRPr>
             </a:pPr>
             <a:r>
-              <a:t>🎬 NETFLIX PRIZE RECOMMENDATION ENGINE</a:t>
-            </a:r>
+              <a:rPr dirty="0" smtClean="0"/>
+              <a:t>🎬</a:t>
+            </a:r>
+            <a:endParaRPr dirty="0"/>
           </a:p>
         </p:txBody>
       </p:sp>
@@ -3147,7 +3609,7 @@
         </p:nvSpPr>
         <p:spPr>
           <a:xfrm>
-            <a:off x="914400" y="3383280"/>
+            <a:off x="853440" y="3223841"/>
             <a:ext cx="10332720" cy="914400"/>
           </a:xfrm>
           <a:prstGeom prst="rect">
@@ -3170,6 +3632,7 @@
               </a:defRPr>
             </a:pPr>
             <a:r>
+              <a:rPr dirty="0"/>
               <a:t>Personalized Recommendation System built on 100M+ Ratings</a:t>
             </a:r>
           </a:p>
@@ -3183,8 +3646,8 @@
         </p:nvSpPr>
         <p:spPr>
           <a:xfrm>
-            <a:off x="914400" y="4754880"/>
-            <a:ext cx="10332720" cy="1371600"/>
+            <a:off x="1551233" y="4343006"/>
+            <a:ext cx="10332720" cy="1569660"/>
           </a:xfrm>
           <a:prstGeom prst="rect">
             <a:avLst/>
@@ -3205,16 +3668,274 @@
                 <a:latin typeface="Arial"/>
               </a:defRPr>
             </a:pPr>
-            <a:r>
+            <a:endParaRPr lang="en-US" dirty="0" smtClean="0"/>
+          </a:p>
+          <a:p>
+            <a:pPr algn="l">
+              <a:defRPr sz="1600" b="0">
+                <a:solidFill>
+                  <a:srgbClr val="A0A0A0"/>
+                </a:solidFill>
+                <a:latin typeface="Arial"/>
+              </a:defRPr>
+            </a:pPr>
+            <a:endParaRPr lang="en-US" dirty="0" smtClean="0"/>
+          </a:p>
+          <a:p>
+            <a:pPr algn="l">
+              <a:defRPr sz="1600" b="0">
+                <a:solidFill>
+                  <a:srgbClr val="A0A0A0"/>
+                </a:solidFill>
+                <a:latin typeface="Arial"/>
+              </a:defRPr>
+            </a:pPr>
+            <a:endParaRPr lang="en-US" dirty="0" smtClean="0"/>
+          </a:p>
+          <a:p>
+            <a:pPr algn="l">
+              <a:defRPr sz="1600" b="0">
+                <a:solidFill>
+                  <a:srgbClr val="A0A0A0"/>
+                </a:solidFill>
+                <a:latin typeface="Arial"/>
+              </a:defRPr>
+            </a:pPr>
+            <a:r>
+              <a:rPr lang="en-US" dirty="0" smtClean="0"/>
+              <a:t>Tamanna</a:t>
+            </a:r>
+            <a:r>
+              <a:rPr dirty="0" smtClean="0"/>
+              <a:t/>
+            </a:r>
+            <a:br>
+              <a:rPr dirty="0" smtClean="0"/>
+            </a:br>
+            <a:r>
+              <a:rPr lang="en-US" dirty="0" smtClean="0"/>
+              <a:t>23323043</a:t>
+            </a:r>
+          </a:p>
+          <a:p>
+            <a:pPr algn="l">
+              <a:defRPr sz="1600" b="0">
+                <a:solidFill>
+                  <a:srgbClr val="A0A0A0"/>
+                </a:solidFill>
+                <a:latin typeface="Arial"/>
+              </a:defRPr>
+            </a:pPr>
+            <a:r>
+              <a:rPr lang="en-US" dirty="0" smtClean="0"/>
+              <a:t>tamanna@ma.iitr.ac.in</a:t>
+            </a:r>
+            <a:endParaRPr dirty="0"/>
+          </a:p>
+        </p:txBody>
+      </p:sp>
+      <p:sp>
+        <p:nvSpPr>
+          <p:cNvPr id="5" name="Rectangle 4"/>
+          <p:cNvSpPr/>
+          <p:nvPr/>
+        </p:nvSpPr>
+        <p:spPr>
+          <a:xfrm>
+            <a:off x="2449946" y="1009591"/>
+            <a:ext cx="6096000" cy="2031325"/>
+          </a:xfrm>
+          <a:prstGeom prst="rect">
+            <a:avLst/>
+          </a:prstGeom>
+        </p:spPr>
+        <p:txBody>
+          <a:bodyPr>
+            <a:spAutoFit/>
+          </a:bodyPr>
+          <a:lstStyle/>
+          <a:p>
+            <a:pPr>
+              <a:defRPr sz="4200" b="1">
+                <a:solidFill>
+                  <a:srgbClr val="E50914"/>
+                </a:solidFill>
+                <a:latin typeface="Arial"/>
+              </a:defRPr>
+            </a:pPr>
+            <a:r>
+              <a:rPr lang="en-IN" dirty="0"/>
+              <a:t>NETFLIX RECOMMENDATION ENGINE</a:t>
+            </a:r>
+            <a:endParaRPr lang="en-IN" dirty="0"/>
+          </a:p>
+        </p:txBody>
+      </p:sp>
+      <p:pic>
+        <p:nvPicPr>
+          <p:cNvPr id="6" name="Picture 5"/>
+          <p:cNvPicPr>
+            <a:picLocks noChangeAspect="1"/>
+          </p:cNvPicPr>
+          <p:nvPr/>
+        </p:nvPicPr>
+        <p:blipFill>
+          <a:blip r:embed="rId3">
+            <a:extLst>
+              <a:ext uri="{28A0092B-C50C-407E-A947-70E740481C1C}">
+                <a14:useLocalDpi xmlns:a14="http://schemas.microsoft.com/office/drawing/2010/main" val="0"/>
+              </a:ext>
+            </a:extLst>
+          </a:blip>
+          <a:stretch>
+            <a:fillRect/>
+          </a:stretch>
+        </p:blipFill>
+        <p:spPr>
+          <a:xfrm>
+            <a:off x="754958" y="1077971"/>
+            <a:ext cx="1796588" cy="1836593"/>
+          </a:xfrm>
+          <a:prstGeom prst="rect">
+            <a:avLst/>
+          </a:prstGeom>
+        </p:spPr>
+      </p:pic>
+      <p:sp>
+        <p:nvSpPr>
+          <p:cNvPr id="7" name="Rectangle 6"/>
+          <p:cNvSpPr/>
+          <p:nvPr/>
+        </p:nvSpPr>
+        <p:spPr>
+          <a:xfrm>
+            <a:off x="6593133" y="5080894"/>
+            <a:ext cx="6096000" cy="830997"/>
+          </a:xfrm>
+          <a:prstGeom prst="rect">
+            <a:avLst/>
+          </a:prstGeom>
+        </p:spPr>
+        <p:txBody>
+          <a:bodyPr>
+            <a:spAutoFit/>
+          </a:bodyPr>
+          <a:lstStyle/>
+          <a:p>
+            <a:pPr>
+              <a:defRPr sz="1600" b="0">
+                <a:solidFill>
+                  <a:srgbClr val="A0A0A0"/>
+                </a:solidFill>
+                <a:latin typeface="Arial"/>
+              </a:defRPr>
+            </a:pPr>
+            <a:r>
+              <a:rPr lang="en-US" dirty="0" err="1" smtClean="0"/>
+              <a:t>Rajlaxmi</a:t>
+            </a:r>
+            <a:endParaRPr lang="en-US" dirty="0" smtClean="0"/>
+          </a:p>
+          <a:p>
+            <a:pPr>
+              <a:defRPr sz="1600" b="0">
+                <a:solidFill>
+                  <a:srgbClr val="A0A0A0"/>
+                </a:solidFill>
+                <a:latin typeface="Arial"/>
+              </a:defRPr>
+            </a:pPr>
+            <a:r>
+              <a:rPr lang="en-US" dirty="0" smtClean="0"/>
+              <a:t>23112082</a:t>
+            </a:r>
+          </a:p>
+          <a:p>
+            <a:pPr>
+              <a:defRPr sz="1600" b="0">
+                <a:solidFill>
+                  <a:srgbClr val="A0A0A0"/>
+                </a:solidFill>
+                <a:latin typeface="Arial"/>
+              </a:defRPr>
+            </a:pPr>
+            <a:r>
+              <a:rPr lang="en-US" dirty="0" smtClean="0"/>
+              <a:t>rajlaxmi@ch.iitr.ac.in</a:t>
+            </a:r>
+            <a:endParaRPr lang="en-US" dirty="0"/>
+          </a:p>
+        </p:txBody>
+      </p:sp>
+      <p:sp>
+        <p:nvSpPr>
+          <p:cNvPr id="9" name="Rectangle 8"/>
+          <p:cNvSpPr/>
+          <p:nvPr/>
+        </p:nvSpPr>
+        <p:spPr>
+          <a:xfrm>
+            <a:off x="5933358" y="5173227"/>
+            <a:ext cx="723275" cy="738664"/>
+          </a:xfrm>
+          <a:prstGeom prst="rect">
+            <a:avLst/>
+          </a:prstGeom>
+        </p:spPr>
+        <p:txBody>
+          <a:bodyPr wrap="none">
+            <a:spAutoFit/>
+          </a:bodyPr>
+          <a:lstStyle/>
+          <a:p>
+            <a:pPr>
+              <a:defRPr sz="4200" b="1">
+                <a:solidFill>
+                  <a:srgbClr val="E50914"/>
+                </a:solidFill>
+                <a:latin typeface="Arial"/>
+              </a:defRPr>
+            </a:pPr>
+            <a:r>
+              <a:rPr lang="en-IN" dirty="0"/>
+              <a:t>🎬</a:t>
+            </a:r>
+            <a:endParaRPr lang="en-IN" dirty="0"/>
+          </a:p>
+        </p:txBody>
+      </p:sp>
+      <p:sp>
+        <p:nvSpPr>
+          <p:cNvPr id="10" name="Rectangle 9"/>
+          <p:cNvSpPr/>
+          <p:nvPr/>
+        </p:nvSpPr>
+        <p:spPr>
+          <a:xfrm>
+            <a:off x="853440" y="4068047"/>
+            <a:ext cx="2977097" cy="400110"/>
+          </a:xfrm>
+          <a:prstGeom prst="rect">
+            <a:avLst/>
+          </a:prstGeom>
+        </p:spPr>
+        <p:txBody>
+          <a:bodyPr wrap="none">
+            <a:spAutoFit/>
+          </a:bodyPr>
+          <a:lstStyle/>
+          <a:p>
+            <a:pPr>
+              <a:defRPr sz="1600" b="0">
+                <a:solidFill>
+                  <a:srgbClr val="A0A0A0"/>
+                </a:solidFill>
+                <a:latin typeface="Arial"/>
+              </a:defRPr>
+            </a:pPr>
+            <a:r>
+              <a:rPr lang="en-IN" sz="2000" dirty="0"/>
               <a:t>Cult Open Projects 2026</a:t>
-            </a:r>
-            <a:br/>
-            <a:r>
-              <a:t>Senior ML Engineering submission</a:t>
-            </a:r>
-            <a:br/>
-            <a:r>
-              <a:t>Author: Senior ML Engineer</a:t>
             </a:r>
           </a:p>
         </p:txBody>
@@ -3228,7 +3949,7 @@
 </file>
 
 <file path=ppt/slides/slide2.xml><?xml version="1.0" encoding="utf-8"?>
-<p:sld xmlns:a="http://schemas.openxmlformats.org/drawingml/2006/main" xmlns:p="http://schemas.openxmlformats.org/presentationml/2006/main" xmlns:r="http://schemas.openxmlformats.org/officeDocument/2006/relationships">
+<p:sld xmlns:a="http://schemas.openxmlformats.org/drawingml/2006/main" xmlns:r="http://schemas.openxmlformats.org/officeDocument/2006/relationships" xmlns:p="http://schemas.openxmlformats.org/presentationml/2006/main">
   <p:cSld>
     <p:bg>
       <p:bgPr>
@@ -3244,7 +3965,14 @@
         <p:cNvGrpSpPr/>
         <p:nvPr/>
       </p:nvGrpSpPr>
-      <p:grpSpPr/>
+      <p:grpSpPr>
+        <a:xfrm>
+          <a:off x="0" y="0"/>
+          <a:ext cx="0" cy="0"/>
+          <a:chOff x="0" y="0"/>
+          <a:chExt cx="0" cy="0"/>
+        </a:xfrm>
+      </p:grpSpPr>
       <p:sp>
         <p:nvSpPr>
           <p:cNvPr id="2" name="TextBox 1"/>
@@ -3254,7 +3982,7 @@
         <p:spPr>
           <a:xfrm>
             <a:off x="457200" y="457200"/>
-            <a:ext cx="11247120" cy="731520"/>
+            <a:ext cx="11247120" cy="646331"/>
           </a:xfrm>
           <a:prstGeom prst="rect">
             <a:avLst/>
@@ -3276,6 +4004,7 @@
               </a:defRPr>
             </a:pPr>
             <a:r>
+              <a:rPr sz="3600" dirty="0"/>
               <a:t>Problem Formulation &amp; Dataset Characteristics</a:t>
             </a:r>
           </a:p>
@@ -3290,7 +4019,7 @@
         <p:spPr>
           <a:xfrm>
             <a:off x="457200" y="1371600"/>
-            <a:ext cx="5486400" cy="4572000"/>
+            <a:ext cx="5486400" cy="4462760"/>
           </a:xfrm>
           <a:prstGeom prst="rect">
             <a:avLst/>
@@ -3312,8 +4041,71 @@
               </a:defRPr>
             </a:pPr>
             <a:r>
-              <a:t>Objective: Predict user ratings (1 to 5 stars) for unseen movies and generate personalized Top-10 lists.</a:t>
-            </a:r>
+              <a:rPr sz="2000" dirty="0">
+                <a:solidFill>
+                  <a:srgbClr val="FF0000"/>
+                </a:solidFill>
+              </a:rPr>
+              <a:t>Objective</a:t>
+            </a:r>
+            <a:r>
+              <a:rPr sz="2000" dirty="0" smtClean="0">
+                <a:solidFill>
+                  <a:srgbClr val="FF0000"/>
+                </a:solidFill>
+              </a:rPr>
+              <a:t>:</a:t>
+            </a:r>
+            <a:endParaRPr lang="en-US" sz="2000" dirty="0" smtClean="0">
+              <a:solidFill>
+                <a:srgbClr val="FF0000"/>
+              </a:solidFill>
+            </a:endParaRPr>
+          </a:p>
+          <a:p>
+            <a:pPr algn="l">
+              <a:defRPr sz="1600" b="0">
+                <a:solidFill>
+                  <a:srgbClr val="F0F0F0"/>
+                </a:solidFill>
+                <a:latin typeface="Arial"/>
+              </a:defRPr>
+            </a:pPr>
+            <a:r>
+              <a:rPr dirty="0" smtClean="0"/>
+              <a:t> </a:t>
+            </a:r>
+            <a:r>
+              <a:rPr dirty="0"/>
+              <a:t>Predict user ratings (1 to 5 stars) for unseen movies and generate personalized Top-10 lists</a:t>
+            </a:r>
+            <a:r>
+              <a:rPr dirty="0" smtClean="0"/>
+              <a:t>.</a:t>
+            </a:r>
+            <a:endParaRPr lang="en-US" dirty="0" smtClean="0"/>
+          </a:p>
+          <a:p>
+            <a:pPr algn="l">
+              <a:defRPr sz="1600" b="0">
+                <a:solidFill>
+                  <a:srgbClr val="F0F0F0"/>
+                </a:solidFill>
+                <a:latin typeface="Arial"/>
+              </a:defRPr>
+            </a:pPr>
+            <a:endParaRPr lang="en-US" dirty="0" smtClean="0"/>
+          </a:p>
+          <a:p>
+            <a:pPr algn="l">
+              <a:defRPr sz="1600" b="0">
+                <a:solidFill>
+                  <a:srgbClr val="F0F0F0"/>
+                </a:solidFill>
+                <a:latin typeface="Arial"/>
+              </a:defRPr>
+            </a:pPr>
+            <a:endParaRPr dirty="0"/>
           </a:p>
           <a:p>
             <a:pPr>
@@ -3325,6 +4117,11 @@
               </a:defRPr>
             </a:pPr>
             <a:r>
+              <a:rPr sz="2000" dirty="0">
+                <a:solidFill>
+                  <a:srgbClr val="FF0000"/>
+                </a:solidFill>
+              </a:rPr>
               <a:t>Key Challenges in Recommender Systems:</a:t>
             </a:r>
           </a:p>
@@ -3338,7 +4135,16 @@
               </a:defRPr>
             </a:pPr>
             <a:r>
-              <a:t>  - Data Sparsity: Only a tiny fraction of user-movie pairs are rated.</a:t>
+              <a:rPr dirty="0"/>
+              <a:t>  - Data </a:t>
+            </a:r>
+            <a:r>
+              <a:rPr dirty="0" err="1"/>
+              <a:t>Sparsity</a:t>
+            </a:r>
+            <a:r>
+              <a:rPr dirty="0"/>
+              <a:t>: Only a tiny fraction of user-movie pairs are rated.</a:t>
             </a:r>
           </a:p>
           <a:p>
@@ -3351,6 +4157,7 @@
               </a:defRPr>
             </a:pPr>
             <a:r>
+              <a:rPr dirty="0"/>
               <a:t>  - Scalability: System must scale to handle 100M+ rows efficiently.</a:t>
             </a:r>
           </a:p>
@@ -3364,8 +4171,14 @@
               </a:defRPr>
             </a:pPr>
             <a:r>
-              <a:t>  - Cold Start: Handling users/items with minimal interaction history.</a:t>
-            </a:r>
+              <a:rPr dirty="0"/>
+              <a:t>  - Cold Start: Handling users/items with minimal interaction history</a:t>
+            </a:r>
+            <a:r>
+              <a:rPr dirty="0" smtClean="0"/>
+              <a:t>.</a:t>
+            </a:r>
+            <a:endParaRPr lang="en-US" dirty="0" smtClean="0"/>
           </a:p>
           <a:p>
             <a:pPr>
@@ -3376,8 +4189,66 @@
                 <a:latin typeface="Arial"/>
               </a:defRPr>
             </a:pPr>
-            <a:r>
-              <a:t>Evaluation focus: Optimizing Root Mean Squared Error (RMSE) and ranking-based Mean Average Precision (MAP@10).</a:t>
+            <a:endParaRPr lang="en-US" dirty="0" smtClean="0"/>
+          </a:p>
+          <a:p>
+            <a:pPr>
+              <a:defRPr sz="1600">
+                <a:solidFill>
+                  <a:srgbClr val="F0F0F0"/>
+                </a:solidFill>
+                <a:latin typeface="Arial"/>
+              </a:defRPr>
+            </a:pPr>
+            <a:endParaRPr dirty="0"/>
+          </a:p>
+          <a:p>
+            <a:pPr>
+              <a:defRPr sz="1600">
+                <a:solidFill>
+                  <a:srgbClr val="F0F0F0"/>
+                </a:solidFill>
+                <a:latin typeface="Arial"/>
+              </a:defRPr>
+            </a:pPr>
+            <a:r>
+              <a:rPr sz="2000" dirty="0">
+                <a:solidFill>
+                  <a:srgbClr val="FF0000"/>
+                </a:solidFill>
+              </a:rPr>
+              <a:t>Evaluation focus</a:t>
+            </a:r>
+            <a:r>
+              <a:rPr sz="2000" dirty="0" smtClean="0">
+                <a:solidFill>
+                  <a:srgbClr val="FF0000"/>
+                </a:solidFill>
+              </a:rPr>
+              <a:t>: </a:t>
+            </a:r>
+            <a:endParaRPr lang="en-US" sz="2000" dirty="0" smtClean="0">
+              <a:solidFill>
+                <a:srgbClr val="FF0000"/>
+              </a:solidFill>
+            </a:endParaRPr>
+          </a:p>
+          <a:p>
+            <a:pPr>
+              <a:defRPr sz="1600">
+                <a:solidFill>
+                  <a:srgbClr val="F0F0F0"/>
+                </a:solidFill>
+                <a:latin typeface="Arial"/>
+              </a:defRPr>
+            </a:pPr>
+            <a:r>
+              <a:rPr dirty="0" smtClean="0"/>
+              <a:t>Optimizing </a:t>
+            </a:r>
+            <a:r>
+              <a:rPr dirty="0"/>
+              <a:t>Root Mean Squared Error (RMSE) and ranking-based Mean Average Precision (MAP@10).</a:t>
             </a:r>
           </a:p>
         </p:txBody>
@@ -3388,7 +4259,13 @@
           <p:cNvGraphicFramePr>
             <a:graphicFrameLocks noGrp="1"/>
           </p:cNvGraphicFramePr>
-          <p:nvPr/>
+          <p:nvPr>
+            <p:extLst>
+              <p:ext uri="{D42A27DB-BD31-4B8C-83A1-F6EECF244321}">
+                <p14:modId xmlns:p14="http://schemas.microsoft.com/office/powerpoint/2010/main" val="2709846723"/>
+              </p:ext>
+            </p:extLst>
+          </p:nvPr>
         </p:nvGraphicFramePr>
         <p:xfrm>
           <a:off x="6400800" y="1645920"/>
@@ -3419,11 +4296,19 @@
                         </a:defRPr>
                       </a:pPr>
                       <a:r>
+                        <a:rPr dirty="0"/>
                         <a:t>Metric</a:t>
                       </a:r>
                     </a:p>
                   </a:txBody>
-                  <a:tcPr/>
+                  <a:tcPr>
+                    <a:solidFill>
+                      <a:schemeClr val="tx1">
+                        <a:lumMod val="75000"/>
+                        <a:lumOff val="25000"/>
+                      </a:schemeClr>
+                    </a:solidFill>
+                  </a:tcPr>
                 </a:tc>
                 <a:tc>
                   <a:txBody>
@@ -3439,11 +4324,19 @@
                         </a:defRPr>
                       </a:pPr>
                       <a:r>
+                        <a:rPr dirty="0"/>
                         <a:t>Sampled Dataset Value</a:t>
                       </a:r>
                     </a:p>
                   </a:txBody>
-                  <a:tcPr/>
+                  <a:tcPr>
+                    <a:solidFill>
+                      <a:schemeClr val="tx1">
+                        <a:lumMod val="75000"/>
+                        <a:lumOff val="25000"/>
+                      </a:schemeClr>
+                    </a:solidFill>
+                  </a:tcPr>
                 </a:tc>
               </a:tr>
               <a:tr h="411480">
@@ -3465,7 +4358,14 @@
                       </a:r>
                     </a:p>
                   </a:txBody>
-                  <a:tcPr/>
+                  <a:tcPr>
+                    <a:solidFill>
+                      <a:schemeClr val="tx1">
+                        <a:lumMod val="95000"/>
+                        <a:lumOff val="5000"/>
+                      </a:schemeClr>
+                    </a:solidFill>
+                  </a:tcPr>
                 </a:tc>
                 <a:tc>
                   <a:txBody>
@@ -3485,7 +4385,14 @@
                       </a:r>
                     </a:p>
                   </a:txBody>
-                  <a:tcPr/>
+                  <a:tcPr>
+                    <a:solidFill>
+                      <a:schemeClr val="tx1">
+                        <a:lumMod val="95000"/>
+                        <a:lumOff val="5000"/>
+                      </a:schemeClr>
+                    </a:solidFill>
+                  </a:tcPr>
                 </a:tc>
               </a:tr>
               <a:tr h="411480">
@@ -3503,11 +4410,19 @@
                         </a:defRPr>
                       </a:pPr>
                       <a:r>
+                        <a:rPr dirty="0"/>
                         <a:t>Unique Users</a:t>
                       </a:r>
                     </a:p>
                   </a:txBody>
-                  <a:tcPr/>
+                  <a:tcPr>
+                    <a:solidFill>
+                      <a:schemeClr val="tx1">
+                        <a:lumMod val="95000"/>
+                        <a:lumOff val="5000"/>
+                      </a:schemeClr>
+                    </a:solidFill>
+                  </a:tcPr>
                 </a:tc>
                 <a:tc>
                   <a:txBody>
@@ -3527,7 +4442,14 @@
                       </a:r>
                     </a:p>
                   </a:txBody>
-                  <a:tcPr/>
+                  <a:tcPr>
+                    <a:solidFill>
+                      <a:schemeClr val="tx1">
+                        <a:lumMod val="95000"/>
+                        <a:lumOff val="5000"/>
+                      </a:schemeClr>
+                    </a:solidFill>
+                  </a:tcPr>
                 </a:tc>
               </a:tr>
               <a:tr h="411480">
@@ -3549,7 +4471,14 @@
                       </a:r>
                     </a:p>
                   </a:txBody>
-                  <a:tcPr/>
+                  <a:tcPr>
+                    <a:solidFill>
+                      <a:schemeClr val="tx1">
+                        <a:lumMod val="95000"/>
+                        <a:lumOff val="5000"/>
+                      </a:schemeClr>
+                    </a:solidFill>
+                  </a:tcPr>
                 </a:tc>
                 <a:tc>
                   <a:txBody>
@@ -3569,7 +4498,14 @@
                       </a:r>
                     </a:p>
                   </a:txBody>
-                  <a:tcPr/>
+                  <a:tcPr>
+                    <a:solidFill>
+                      <a:schemeClr val="tx1">
+                        <a:lumMod val="95000"/>
+                        <a:lumOff val="5000"/>
+                      </a:schemeClr>
+                    </a:solidFill>
+                  </a:tcPr>
                 </a:tc>
               </a:tr>
               <a:tr h="411480">
@@ -3591,7 +4527,14 @@
                       </a:r>
                     </a:p>
                   </a:txBody>
-                  <a:tcPr/>
+                  <a:tcPr>
+                    <a:solidFill>
+                      <a:schemeClr val="tx1">
+                        <a:lumMod val="95000"/>
+                        <a:lumOff val="5000"/>
+                      </a:schemeClr>
+                    </a:solidFill>
+                  </a:tcPr>
                 </a:tc>
                 <a:tc>
                   <a:txBody>
@@ -3611,7 +4554,14 @@
                       </a:r>
                     </a:p>
                   </a:txBody>
-                  <a:tcPr/>
+                  <a:tcPr>
+                    <a:solidFill>
+                      <a:schemeClr val="tx1">
+                        <a:lumMod val="95000"/>
+                        <a:lumOff val="5000"/>
+                      </a:schemeClr>
+                    </a:solidFill>
+                  </a:tcPr>
                 </a:tc>
               </a:tr>
               <a:tr h="411480">
@@ -3629,11 +4579,19 @@
                         </a:defRPr>
                       </a:pPr>
                       <a:r>
+                        <a:rPr dirty="0"/>
                         <a:t>Mean Rating</a:t>
                       </a:r>
                     </a:p>
                   </a:txBody>
-                  <a:tcPr/>
+                  <a:tcPr>
+                    <a:solidFill>
+                      <a:schemeClr val="tx1">
+                        <a:lumMod val="95000"/>
+                        <a:lumOff val="5000"/>
+                      </a:schemeClr>
+                    </a:solidFill>
+                  </a:tcPr>
                 </a:tc>
                 <a:tc>
                   <a:txBody>
@@ -3653,7 +4611,14 @@
                       </a:r>
                     </a:p>
                   </a:txBody>
-                  <a:tcPr/>
+                  <a:tcPr>
+                    <a:solidFill>
+                      <a:schemeClr val="tx1">
+                        <a:lumMod val="95000"/>
+                        <a:lumOff val="5000"/>
+                      </a:schemeClr>
+                    </a:solidFill>
+                  </a:tcPr>
                 </a:tc>
               </a:tr>
               <a:tr h="411480">
@@ -3671,11 +4636,19 @@
                         </a:defRPr>
                       </a:pPr>
                       <a:r>
+                        <a:rPr dirty="0"/>
                         <a:t>Median Rating</a:t>
                       </a:r>
                     </a:p>
                   </a:txBody>
-                  <a:tcPr/>
+                  <a:tcPr>
+                    <a:solidFill>
+                      <a:schemeClr val="tx1">
+                        <a:lumMod val="95000"/>
+                        <a:lumOff val="5000"/>
+                      </a:schemeClr>
+                    </a:solidFill>
+                  </a:tcPr>
                 </a:tc>
                 <a:tc>
                   <a:txBody>
@@ -3695,7 +4668,14 @@
                       </a:r>
                     </a:p>
                   </a:txBody>
-                  <a:tcPr/>
+                  <a:tcPr>
+                    <a:solidFill>
+                      <a:schemeClr val="tx1">
+                        <a:lumMod val="95000"/>
+                        <a:lumOff val="5000"/>
+                      </a:schemeClr>
+                    </a:solidFill>
+                  </a:tcPr>
                 </a:tc>
               </a:tr>
               <a:tr h="411480">
@@ -3717,7 +4697,14 @@
                       </a:r>
                     </a:p>
                   </a:txBody>
-                  <a:tcPr/>
+                  <a:tcPr>
+                    <a:solidFill>
+                      <a:schemeClr val="tx1">
+                        <a:lumMod val="95000"/>
+                        <a:lumOff val="5000"/>
+                      </a:schemeClr>
+                    </a:solidFill>
+                  </a:tcPr>
                 </a:tc>
                 <a:tc>
                   <a:txBody>
@@ -3737,7 +4724,14 @@
                       </a:r>
                     </a:p>
                   </a:txBody>
-                  <a:tcPr/>
+                  <a:tcPr>
+                    <a:solidFill>
+                      <a:schemeClr val="tx1">
+                        <a:lumMod val="95000"/>
+                        <a:lumOff val="5000"/>
+                      </a:schemeClr>
+                    </a:solidFill>
+                  </a:tcPr>
                 </a:tc>
               </a:tr>
               <a:tr h="411480">
@@ -3759,7 +4753,14 @@
                       </a:r>
                     </a:p>
                   </a:txBody>
-                  <a:tcPr/>
+                  <a:tcPr>
+                    <a:solidFill>
+                      <a:schemeClr val="tx1">
+                        <a:lumMod val="95000"/>
+                        <a:lumOff val="5000"/>
+                      </a:schemeClr>
+                    </a:solidFill>
+                  </a:tcPr>
                 </a:tc>
                 <a:tc>
                   <a:txBody>
@@ -3779,7 +4780,14 @@
                       </a:r>
                     </a:p>
                   </a:txBody>
-                  <a:tcPr/>
+                  <a:tcPr>
+                    <a:solidFill>
+                      <a:schemeClr val="tx1">
+                        <a:lumMod val="95000"/>
+                        <a:lumOff val="5000"/>
+                      </a:schemeClr>
+                    </a:solidFill>
+                  </a:tcPr>
                 </a:tc>
               </a:tr>
               <a:tr h="411480">
@@ -3801,7 +4809,14 @@
                       </a:r>
                     </a:p>
                   </a:txBody>
-                  <a:tcPr/>
+                  <a:tcPr>
+                    <a:solidFill>
+                      <a:schemeClr val="tx1">
+                        <a:lumMod val="95000"/>
+                        <a:lumOff val="5000"/>
+                      </a:schemeClr>
+                    </a:solidFill>
+                  </a:tcPr>
                 </a:tc>
                 <a:tc>
                   <a:txBody>
@@ -3817,11 +4832,19 @@
                         </a:defRPr>
                       </a:pPr>
                       <a:r>
+                        <a:rPr dirty="0"/>
                         <a:t>2005-12-31</a:t>
                       </a:r>
                     </a:p>
                   </a:txBody>
-                  <a:tcPr/>
+                  <a:tcPr>
+                    <a:solidFill>
+                      <a:schemeClr val="tx1">
+                        <a:lumMod val="95000"/>
+                        <a:lumOff val="5000"/>
+                      </a:schemeClr>
+                    </a:solidFill>
+                  </a:tcPr>
                 </a:tc>
               </a:tr>
             </a:tbl>
@@ -3837,7 +4860,7 @@
 </file>
 
 <file path=ppt/slides/slide3.xml><?xml version="1.0" encoding="utf-8"?>
-<p:sld xmlns:a="http://schemas.openxmlformats.org/drawingml/2006/main" xmlns:p="http://schemas.openxmlformats.org/presentationml/2006/main" xmlns:r="http://schemas.openxmlformats.org/officeDocument/2006/relationships">
+<p:sld xmlns:a="http://schemas.openxmlformats.org/drawingml/2006/main" xmlns:r="http://schemas.openxmlformats.org/officeDocument/2006/relationships" xmlns:p="http://schemas.openxmlformats.org/presentationml/2006/main">
   <p:cSld>
     <p:bg>
       <p:bgPr>
@@ -3853,7 +4876,14 @@
         <p:cNvGrpSpPr/>
         <p:nvPr/>
       </p:nvGrpSpPr>
-      <p:grpSpPr/>
+      <p:grpSpPr>
+        <a:xfrm>
+          <a:off x="0" y="0"/>
+          <a:ext cx="0" cy="0"/>
+          <a:chOff x="0" y="0"/>
+          <a:chExt cx="0" cy="0"/>
+        </a:xfrm>
+      </p:grpSpPr>
       <p:sp>
         <p:nvSpPr>
           <p:cNvPr id="2" name="TextBox 1"/>
@@ -3863,7 +4893,7 @@
         <p:spPr>
           <a:xfrm>
             <a:off x="457200" y="457200"/>
-            <a:ext cx="11247120" cy="731520"/>
+            <a:ext cx="11247120" cy="646331"/>
           </a:xfrm>
           <a:prstGeom prst="rect">
             <a:avLst/>
@@ -3885,6 +4915,7 @@
               </a:defRPr>
             </a:pPr>
             <a:r>
+              <a:rPr sz="3600" dirty="0"/>
               <a:t>Exploratory Data Analysis: Key Insights</a:t>
             </a:r>
           </a:p>
@@ -3898,8 +4929,8 @@
         </p:nvSpPr>
         <p:spPr>
           <a:xfrm>
-            <a:off x="457200" y="1371600"/>
-            <a:ext cx="4114800" cy="4572000"/>
+            <a:off x="457200" y="1422400"/>
+            <a:ext cx="4114800" cy="4278094"/>
           </a:xfrm>
           <a:prstGeom prst="rect">
             <a:avLst/>
@@ -3921,8 +4952,60 @@
               </a:defRPr>
             </a:pPr>
             <a:r>
-              <a:t>1. Right-Skewed Ratings: 4 and 5-star ratings dominate. Users exhibit systemic positive biases.</a:t>
-            </a:r>
+              <a:rPr sz="2000" dirty="0">
+                <a:solidFill>
+                  <a:srgbClr val="FF0000"/>
+                </a:solidFill>
+              </a:rPr>
+              <a:t>1. Right-Skewed Ratings</a:t>
+            </a:r>
+            <a:r>
+              <a:rPr sz="2000" dirty="0" smtClean="0">
+                <a:solidFill>
+                  <a:srgbClr val="FF0000"/>
+                </a:solidFill>
+              </a:rPr>
+              <a:t>:</a:t>
+            </a:r>
+            <a:endParaRPr lang="en-US" sz="2000" dirty="0" smtClean="0">
+              <a:solidFill>
+                <a:srgbClr val="FF0000"/>
+              </a:solidFill>
+            </a:endParaRPr>
+          </a:p>
+          <a:p>
+            <a:pPr algn="l">
+              <a:defRPr sz="1600" b="0">
+                <a:solidFill>
+                  <a:srgbClr val="F0F0F0"/>
+                </a:solidFill>
+                <a:latin typeface="Arial"/>
+              </a:defRPr>
+            </a:pPr>
+            <a:r>
+              <a:rPr dirty="0" smtClean="0"/>
+              <a:t>4 </a:t>
+            </a:r>
+            <a:r>
+              <a:rPr dirty="0"/>
+              <a:t>and 5-star ratings dominate. Users exhibit systemic positive biases</a:t>
+            </a:r>
+            <a:r>
+              <a:rPr dirty="0" smtClean="0"/>
+              <a:t>.</a:t>
+            </a:r>
+            <a:endParaRPr lang="en-US" dirty="0" smtClean="0"/>
+          </a:p>
+          <a:p>
+            <a:pPr algn="l">
+              <a:defRPr sz="1600" b="0">
+                <a:solidFill>
+                  <a:srgbClr val="F0F0F0"/>
+                </a:solidFill>
+                <a:latin typeface="Arial"/>
+              </a:defRPr>
+            </a:pPr>
+            <a:endParaRPr dirty="0"/>
           </a:p>
           <a:p>
             <a:pPr>
@@ -3934,8 +5017,26 @@
               </a:defRPr>
             </a:pPr>
             <a:r>
-              <a:t>2. Extreme Sparsity: Only 0.075% of matrix is populated. Visualized in user-movie heatmap.</a:t>
-            </a:r>
+              <a:rPr sz="2000" dirty="0">
+                <a:solidFill>
+                  <a:srgbClr val="FF0000"/>
+                </a:solidFill>
+              </a:rPr>
+              <a:t>2. Extreme </a:t>
+            </a:r>
+            <a:r>
+              <a:rPr sz="2000" dirty="0" smtClean="0">
+                <a:solidFill>
+                  <a:srgbClr val="FF0000"/>
+                </a:solidFill>
+              </a:rPr>
+              <a:t>Sparsity:</a:t>
+            </a:r>
+            <a:endParaRPr lang="en-US" sz="2000" dirty="0" smtClean="0">
+              <a:solidFill>
+                <a:srgbClr val="FF0000"/>
+              </a:solidFill>
+            </a:endParaRPr>
           </a:p>
           <a:p>
             <a:pPr>
@@ -3947,8 +5048,18 @@
               </a:defRPr>
             </a:pPr>
             <a:r>
-              <a:t>3. Long Tail: 10% of movies receive 80% of total ratings. Niche movies have under 100 reviews.</a:t>
-            </a:r>
+              <a:rPr dirty="0" smtClean="0"/>
+              <a:t>Only </a:t>
+            </a:r>
+            <a:r>
+              <a:rPr dirty="0"/>
+              <a:t>0.075% of matrix is populated. Visualized in user-movie </a:t>
+            </a:r>
+            <a:r>
+              <a:rPr dirty="0" smtClean="0"/>
+              <a:t>heatmap.</a:t>
+            </a:r>
+            <a:endParaRPr lang="en-US" dirty="0" smtClean="0"/>
           </a:p>
           <a:p>
             <a:pPr>
@@ -3959,8 +5070,116 @@
                 <a:latin typeface="Arial"/>
               </a:defRPr>
             </a:pPr>
-            <a:r>
-              <a:t>4. Temporal Consistency: Monthly volume grew exponentially over time, but average ratings stayed stable near ~3.6.</a:t>
+            <a:endParaRPr dirty="0"/>
+          </a:p>
+          <a:p>
+            <a:pPr>
+              <a:defRPr sz="1600">
+                <a:solidFill>
+                  <a:srgbClr val="F0F0F0"/>
+                </a:solidFill>
+                <a:latin typeface="Arial"/>
+              </a:defRPr>
+            </a:pPr>
+            <a:r>
+              <a:rPr sz="2000" dirty="0">
+                <a:solidFill>
+                  <a:srgbClr val="FF0000"/>
+                </a:solidFill>
+              </a:rPr>
+              <a:t>3. Long Tail: </a:t>
+            </a:r>
+            <a:endParaRPr lang="en-US" sz="2000" dirty="0" smtClean="0">
+              <a:solidFill>
+                <a:srgbClr val="FF0000"/>
+              </a:solidFill>
+            </a:endParaRPr>
+          </a:p>
+          <a:p>
+            <a:pPr>
+              <a:defRPr sz="1600">
+                <a:solidFill>
+                  <a:srgbClr val="F0F0F0"/>
+                </a:solidFill>
+                <a:latin typeface="Arial"/>
+              </a:defRPr>
+            </a:pPr>
+            <a:r>
+              <a:rPr dirty="0" smtClean="0"/>
+              <a:t>10</a:t>
+            </a:r>
+            <a:r>
+              <a:rPr dirty="0"/>
+              <a:t>% of movies receive 80% of total ratings. Niche movies have under 100 </a:t>
+            </a:r>
+            <a:r>
+              <a:rPr dirty="0" smtClean="0"/>
+              <a:t>reviews</a:t>
+            </a:r>
+            <a:endParaRPr lang="en-US" dirty="0" smtClean="0"/>
+          </a:p>
+          <a:p>
+            <a:pPr>
+              <a:defRPr sz="1600">
+                <a:solidFill>
+                  <a:srgbClr val="F0F0F0"/>
+                </a:solidFill>
+                <a:latin typeface="Arial"/>
+              </a:defRPr>
+            </a:pPr>
+            <a:r>
+              <a:rPr dirty="0" smtClean="0"/>
+              <a:t>.</a:t>
+            </a:r>
+            <a:endParaRPr dirty="0"/>
+          </a:p>
+          <a:p>
+            <a:pPr>
+              <a:defRPr sz="1600">
+                <a:solidFill>
+                  <a:srgbClr val="F0F0F0"/>
+                </a:solidFill>
+                <a:latin typeface="Arial"/>
+              </a:defRPr>
+            </a:pPr>
+            <a:r>
+              <a:rPr sz="2000" dirty="0">
+                <a:solidFill>
+                  <a:srgbClr val="FF0000"/>
+                </a:solidFill>
+              </a:rPr>
+              <a:t>4. Temporal Consistency</a:t>
+            </a:r>
+            <a:r>
+              <a:rPr sz="2000" dirty="0" smtClean="0">
+                <a:solidFill>
+                  <a:srgbClr val="FF0000"/>
+                </a:solidFill>
+              </a:rPr>
+              <a:t>:</a:t>
+            </a:r>
+            <a:endParaRPr lang="en-US" sz="2000" dirty="0" smtClean="0">
+              <a:solidFill>
+                <a:srgbClr val="FF0000"/>
+              </a:solidFill>
+            </a:endParaRPr>
+          </a:p>
+          <a:p>
+            <a:pPr>
+              <a:defRPr sz="1600">
+                <a:solidFill>
+                  <a:srgbClr val="F0F0F0"/>
+                </a:solidFill>
+                <a:latin typeface="Arial"/>
+              </a:defRPr>
+            </a:pPr>
+            <a:r>
+              <a:rPr dirty="0" smtClean="0"/>
+              <a:t>Monthly </a:t>
+            </a:r>
+            <a:r>
+              <a:rPr dirty="0"/>
+              <a:t>volume grew exponentially over time, but average ratings stayed stable near ~3.6.</a:t>
             </a:r>
           </a:p>
         </p:txBody>
@@ -4022,7 +5241,7 @@
 </file>
 
 <file path=ppt/slides/slide4.xml><?xml version="1.0" encoding="utf-8"?>
-<p:sld xmlns:a="http://schemas.openxmlformats.org/drawingml/2006/main" xmlns:p="http://schemas.openxmlformats.org/presentationml/2006/main" xmlns:r="http://schemas.openxmlformats.org/officeDocument/2006/relationships">
+<p:sld xmlns:a="http://schemas.openxmlformats.org/drawingml/2006/main" xmlns:r="http://schemas.openxmlformats.org/officeDocument/2006/relationships" xmlns:p="http://schemas.openxmlformats.org/presentationml/2006/main">
   <p:cSld>
     <p:bg>
       <p:bgPr>
@@ -4038,7 +5257,14 @@
         <p:cNvGrpSpPr/>
         <p:nvPr/>
       </p:nvGrpSpPr>
-      <p:grpSpPr/>
+      <p:grpSpPr>
+        <a:xfrm>
+          <a:off x="0" y="0"/>
+          <a:ext cx="0" cy="0"/>
+          <a:chOff x="0" y="0"/>
+          <a:chExt cx="0" cy="0"/>
+        </a:xfrm>
+      </p:grpSpPr>
       <p:sp>
         <p:nvSpPr>
           <p:cNvPr id="2" name="TextBox 1"/>
@@ -4048,7 +5274,7 @@
         <p:spPr>
           <a:xfrm>
             <a:off x="457200" y="457200"/>
-            <a:ext cx="11247120" cy="731520"/>
+            <a:ext cx="11247120" cy="646331"/>
           </a:xfrm>
           <a:prstGeom prst="rect">
             <a:avLst/>
@@ -4070,6 +5296,7 @@
               </a:defRPr>
             </a:pPr>
             <a:r>
+              <a:rPr sz="3600"/>
               <a:t>Model Abstraction &amp; Architecture</a:t>
             </a:r>
           </a:p>
@@ -4084,7 +5311,7 @@
         <p:spPr>
           <a:xfrm>
             <a:off x="457200" y="1371600"/>
-            <a:ext cx="5303520" cy="4754880"/>
+            <a:ext cx="5303520" cy="4339650"/>
           </a:xfrm>
           <a:prstGeom prst="rect">
             <a:avLst/>
@@ -4106,8 +5333,37 @@
               </a:defRPr>
             </a:pPr>
             <a:r>
-              <a:t>SVD (Singular Value Decomposition):</a:t>
-            </a:r>
+              <a:rPr sz="2000" dirty="0">
+                <a:solidFill>
+                  <a:srgbClr val="FF0000"/>
+                </a:solidFill>
+              </a:rPr>
+              <a:t>SVD (Singular Value Decomposition</a:t>
+            </a:r>
+            <a:r>
+              <a:rPr sz="2000" dirty="0" smtClean="0">
+                <a:solidFill>
+                  <a:srgbClr val="FF0000"/>
+                </a:solidFill>
+              </a:rPr>
+              <a:t>):</a:t>
+            </a:r>
+            <a:endParaRPr lang="en-US" sz="2000" dirty="0" smtClean="0">
+              <a:solidFill>
+                <a:srgbClr val="FF0000"/>
+              </a:solidFill>
+            </a:endParaRPr>
+          </a:p>
+          <a:p>
+            <a:pPr algn="l">
+              <a:defRPr sz="1600" b="0">
+                <a:solidFill>
+                  <a:srgbClr val="F0F0F0"/>
+                </a:solidFill>
+                <a:latin typeface="Arial"/>
+              </a:defRPr>
+            </a:pPr>
+            <a:endParaRPr dirty="0"/>
           </a:p>
           <a:p>
             <a:pPr>
@@ -4119,8 +5375,14 @@
               </a:defRPr>
             </a:pPr>
             <a:r>
-              <a:t>  - Maps users and movies into d-dimensional latent space.</a:t>
-            </a:r>
+              <a:rPr dirty="0"/>
+              <a:t>  - Maps users and movies into d-dimensional latent space</a:t>
+            </a:r>
+            <a:r>
+              <a:rPr dirty="0" smtClean="0"/>
+              <a:t>.</a:t>
+            </a:r>
+            <a:endParaRPr lang="en-US" dirty="0" smtClean="0"/>
           </a:p>
           <a:p>
             <a:pPr>
@@ -4131,9 +5393,7 @@
                 <a:latin typeface="Arial"/>
               </a:defRPr>
             </a:pPr>
-            <a:r>
-              <a:t>  - Rating is predicted via dot product of user &amp; item vectors plus biases:</a:t>
-            </a:r>
+            <a:endParaRPr dirty="0"/>
           </a:p>
           <a:p>
             <a:pPr>
@@ -4145,7 +5405,8 @@
               </a:defRPr>
             </a:pPr>
             <a:r>
-              <a:t>    r_pred = mu + b_u + b_i + p_u.T * q_i</a:t>
+              <a:rPr dirty="0"/>
+              <a:t>  - Rating is predicted via dot product of user &amp; item vectors plus biases:</a:t>
             </a:r>
           </a:p>
           <a:p>
@@ -4158,8 +5419,22 @@
               </a:defRPr>
             </a:pPr>
             <a:r>
-              <a:t>  - Regularized L2 loss optimized using SGD.</a:t>
-            </a:r>
+              <a:rPr dirty="0"/>
+              <a:t>    </a:t>
+            </a:r>
+            <a:r>
+              <a:rPr dirty="0" err="1"/>
+              <a:t>r_pred</a:t>
+            </a:r>
+            <a:r>
+              <a:rPr dirty="0"/>
+              <a:t> = mu + b_u + b_i + p_u.T * </a:t>
+            </a:r>
+            <a:r>
+              <a:rPr dirty="0" err="1" smtClean="0"/>
+              <a:t>q_i</a:t>
+            </a:r>
+            <a:endParaRPr lang="en-US" dirty="0" smtClean="0"/>
           </a:p>
           <a:p>
             <a:pPr>
@@ -4170,9 +5445,7 @@
                 <a:latin typeface="Arial"/>
               </a:defRPr>
             </a:pPr>
-            <a:r>
-              <a:t>Memory-Based Collaborative Filtering:</a:t>
-            </a:r>
+            <a:endParaRPr dirty="0"/>
           </a:p>
           <a:p>
             <a:pPr>
@@ -4184,7 +5457,8 @@
               </a:defRPr>
             </a:pPr>
             <a:r>
-              <a:t>  - User-CF: Recommends items liked by similar users.</a:t>
+              <a:rPr dirty="0"/>
+              <a:t>  - Regularized L2 loss optimized using SGD.</a:t>
             </a:r>
           </a:p>
           <a:p>
@@ -4197,8 +5471,14 @@
               </a:defRPr>
             </a:pPr>
             <a:r>
-              <a:t>  - Item-CF: Recommends items similar to user's favorite history.</a:t>
-            </a:r>
+              <a:rPr dirty="0"/>
+              <a:t>Memory-Based Collaborative Filtering</a:t>
+            </a:r>
+            <a:r>
+              <a:rPr dirty="0" smtClean="0"/>
+              <a:t>:</a:t>
+            </a:r>
+            <a:endParaRPr dirty="0"/>
           </a:p>
           <a:p>
             <a:pPr>
@@ -4210,7 +5490,60 @@
               </a:defRPr>
             </a:pPr>
             <a:r>
-              <a:t>  - Similarity computed via Cosine Similarity on user/movie rating vectors.</a:t>
+              <a:rPr dirty="0"/>
+              <a:t>  - User-CF: Recommends items liked by similar users.</a:t>
+            </a:r>
+          </a:p>
+          <a:p>
+            <a:pPr>
+              <a:defRPr sz="1600">
+                <a:solidFill>
+                  <a:srgbClr val="F0F0F0"/>
+                </a:solidFill>
+                <a:latin typeface="Arial"/>
+              </a:defRPr>
+            </a:pPr>
+            <a:r>
+              <a:rPr dirty="0"/>
+              <a:t>  - Item-CF: Recommends items similar to user's favorite history</a:t>
+            </a:r>
+            <a:r>
+              <a:rPr dirty="0" smtClean="0"/>
+              <a:t>.</a:t>
+            </a:r>
+            <a:endParaRPr lang="en-US" dirty="0" smtClean="0"/>
+          </a:p>
+          <a:p>
+            <a:pPr>
+              <a:defRPr sz="1600">
+                <a:solidFill>
+                  <a:srgbClr val="F0F0F0"/>
+                </a:solidFill>
+                <a:latin typeface="Arial"/>
+              </a:defRPr>
+            </a:pPr>
+            <a:endParaRPr dirty="0"/>
+          </a:p>
+          <a:p>
+            <a:pPr>
+              <a:defRPr sz="1600">
+                <a:solidFill>
+                  <a:srgbClr val="F0F0F0"/>
+                </a:solidFill>
+                <a:latin typeface="Arial"/>
+              </a:defRPr>
+            </a:pPr>
+            <a:r>
+              <a:rPr dirty="0"/>
+              <a:t>  - Similarity computed via Cosine </a:t>
+            </a:r>
+            <a:r>
+              <a:rPr dirty="0" smtClean="0"/>
+              <a:t>Similarity </a:t>
+            </a:r>
+            <a:r>
+              <a:rPr dirty="0"/>
+              <a:t>on user/movie rating vectors.</a:t>
             </a:r>
           </a:p>
         </p:txBody>
@@ -4224,7 +5557,7 @@
         <p:spPr>
           <a:xfrm>
             <a:off x="6217920" y="1371600"/>
-            <a:ext cx="5486400" cy="4754880"/>
+            <a:ext cx="5486400" cy="4339650"/>
           </a:xfrm>
           <a:prstGeom prst="rect">
             <a:avLst/>
@@ -4246,8 +5579,37 @@
               </a:defRPr>
             </a:pPr>
             <a:r>
-              <a:t>Neural Collaborative Filtering (NCF):</a:t>
-            </a:r>
+              <a:rPr sz="2000" dirty="0">
+                <a:solidFill>
+                  <a:srgbClr val="FF0000"/>
+                </a:solidFill>
+              </a:rPr>
+              <a:t>Neural Collaborative Filtering (NCF</a:t>
+            </a:r>
+            <a:r>
+              <a:rPr sz="2000" dirty="0" smtClean="0">
+                <a:solidFill>
+                  <a:srgbClr val="FF0000"/>
+                </a:solidFill>
+              </a:rPr>
+              <a:t>):</a:t>
+            </a:r>
+            <a:endParaRPr lang="en-US" sz="2000" dirty="0" smtClean="0">
+              <a:solidFill>
+                <a:srgbClr val="FF0000"/>
+              </a:solidFill>
+            </a:endParaRPr>
+          </a:p>
+          <a:p>
+            <a:pPr algn="l">
+              <a:defRPr sz="1600" b="0">
+                <a:solidFill>
+                  <a:srgbClr val="F0F0F0"/>
+                </a:solidFill>
+                <a:latin typeface="Arial"/>
+              </a:defRPr>
+            </a:pPr>
+            <a:endParaRPr dirty="0"/>
           </a:p>
           <a:p>
             <a:pPr>
@@ -4259,8 +5621,14 @@
               </a:defRPr>
             </a:pPr>
             <a:r>
-              <a:t>  - Deep learning approach replacing inner product with neural network.</a:t>
-            </a:r>
+              <a:rPr dirty="0"/>
+              <a:t>  - Deep learning approach replacing inner product with neural network</a:t>
+            </a:r>
+            <a:r>
+              <a:rPr dirty="0" smtClean="0"/>
+              <a:t>.</a:t>
+            </a:r>
+            <a:endParaRPr lang="en-US" dirty="0" smtClean="0"/>
           </a:p>
           <a:p>
             <a:pPr>
@@ -4271,9 +5639,7 @@
                 <a:latin typeface="Arial"/>
               </a:defRPr>
             </a:pPr>
-            <a:r>
-              <a:t>  - Architecture overview:</a:t>
-            </a:r>
+            <a:endParaRPr dirty="0"/>
           </a:p>
           <a:p>
             <a:pPr>
@@ -4285,7 +5651,8 @@
               </a:defRPr>
             </a:pPr>
             <a:r>
-              <a:t>    1. Input: Sparse User ID and Movie ID.</a:t>
+              <a:rPr dirty="0"/>
+              <a:t>  - Architecture overview:</a:t>
             </a:r>
           </a:p>
           <a:p>
@@ -4298,7 +5665,8 @@
               </a:defRPr>
             </a:pPr>
             <a:r>
-              <a:t>    2. Embedding Layer: Map inputs to 32-dim dense vectors.</a:t>
+              <a:rPr dirty="0"/>
+              <a:t>    1. Input: Sparse User ID and Movie ID.</a:t>
             </a:r>
           </a:p>
           <a:p>
@@ -4311,7 +5679,8 @@
               </a:defRPr>
             </a:pPr>
             <a:r>
-              <a:t>    3. Multi-Layer Perceptron (MLP): Non-linear interactions.</a:t>
+              <a:rPr dirty="0"/>
+              <a:t>    2. Embedding Layer: Map inputs to 32-dim dense vectors.</a:t>
             </a:r>
           </a:p>
           <a:p>
@@ -4324,7 +5693,8 @@
               </a:defRPr>
             </a:pPr>
             <a:r>
-              <a:t>       MLP Layers: 64 -&gt; 32 -&gt; 16.</a:t>
+              <a:rPr dirty="0"/>
+              <a:t>    3. Multi-Layer Perceptron (MLP): Non-linear interactions.</a:t>
             </a:r>
           </a:p>
           <a:p>
@@ -4337,7 +5707,8 @@
               </a:defRPr>
             </a:pPr>
             <a:r>
-              <a:t>    4. Prediction Layer: Sigmoid activation scaled to [1, 5] rating output.</a:t>
+              <a:rPr dirty="0"/>
+              <a:t>       MLP Layers: 64 -&gt; 32 -&gt; 16.</a:t>
             </a:r>
           </a:p>
           <a:p>
@@ -4350,6 +5721,37 @@
               </a:defRPr>
             </a:pPr>
             <a:r>
+              <a:rPr dirty="0"/>
+              <a:t>    4. Prediction Layer: Sigmoid activation scaled to [1, 5] rating output</a:t>
+            </a:r>
+            <a:r>
+              <a:rPr dirty="0" smtClean="0"/>
+              <a:t>.</a:t>
+            </a:r>
+            <a:endParaRPr lang="en-US" dirty="0" smtClean="0"/>
+          </a:p>
+          <a:p>
+            <a:pPr>
+              <a:defRPr sz="1600">
+                <a:solidFill>
+                  <a:srgbClr val="F0F0F0"/>
+                </a:solidFill>
+                <a:latin typeface="Arial"/>
+              </a:defRPr>
+            </a:pPr>
+            <a:endParaRPr dirty="0"/>
+          </a:p>
+          <a:p>
+            <a:pPr>
+              <a:defRPr sz="1600">
+                <a:solidFill>
+                  <a:srgbClr val="F0F0F0"/>
+                </a:solidFill>
+                <a:latin typeface="Arial"/>
+              </a:defRPr>
+            </a:pPr>
+            <a:r>
+              <a:rPr dirty="0"/>
               <a:t>  - Advantage: Learns complex non-linear user-movie relationships.</a:t>
             </a:r>
           </a:p>
@@ -4364,7 +5766,7 @@
 </file>
 
 <file path=ppt/slides/slide5.xml><?xml version="1.0" encoding="utf-8"?>
-<p:sld xmlns:a="http://schemas.openxmlformats.org/drawingml/2006/main" xmlns:p="http://schemas.openxmlformats.org/presentationml/2006/main" xmlns:r="http://schemas.openxmlformats.org/officeDocument/2006/relationships">
+<p:sld xmlns:a="http://schemas.openxmlformats.org/drawingml/2006/main" xmlns:r="http://schemas.openxmlformats.org/officeDocument/2006/relationships" xmlns:p="http://schemas.openxmlformats.org/presentationml/2006/main">
   <p:cSld>
     <p:bg>
       <p:bgPr>
@@ -4380,7 +5782,14 @@
         <p:cNvGrpSpPr/>
         <p:nvPr/>
       </p:nvGrpSpPr>
-      <p:grpSpPr/>
+      <p:grpSpPr>
+        <a:xfrm>
+          <a:off x="0" y="0"/>
+          <a:ext cx="0" cy="0"/>
+          <a:chOff x="0" y="0"/>
+          <a:chExt cx="0" cy="0"/>
+        </a:xfrm>
+      </p:grpSpPr>
       <p:sp>
         <p:nvSpPr>
           <p:cNvPr id="2" name="TextBox 1"/>
@@ -4390,7 +5799,7 @@
         <p:spPr>
           <a:xfrm>
             <a:off x="457200" y="457200"/>
-            <a:ext cx="11247120" cy="731520"/>
+            <a:ext cx="11247120" cy="646331"/>
           </a:xfrm>
           <a:prstGeom prst="rect">
             <a:avLst/>
@@ -4412,6 +5821,7 @@
               </a:defRPr>
             </a:pPr>
             <a:r>
+              <a:rPr sz="3600" dirty="0"/>
               <a:t>Performance Evaluation Results</a:t>
             </a:r>
           </a:p>
@@ -4425,8 +5835,8 @@
         </p:nvSpPr>
         <p:spPr>
           <a:xfrm>
-            <a:off x="457200" y="1371600"/>
-            <a:ext cx="4754880" cy="4754880"/>
+            <a:off x="457200" y="1410393"/>
+            <a:ext cx="4516582" cy="4770537"/>
           </a:xfrm>
           <a:prstGeom prst="rect">
             <a:avLst/>
@@ -4448,8 +5858,36 @@
               </a:defRPr>
             </a:pPr>
             <a:r>
-              <a:t>SVD Matrix Factorization emerges as the best overall model with RMSE of ~0.87.</a:t>
-            </a:r>
+              <a:rPr sz="1900" dirty="0"/>
+              <a:t>SVD Matrix Factorization emerges as the best overall model with RMSE of </a:t>
+            </a:r>
+            <a:r>
+              <a:rPr sz="1900" dirty="0">
+                <a:solidFill>
+                  <a:schemeClr val="accent6">
+                    <a:lumMod val="60000"/>
+                    <a:lumOff val="40000"/>
+                  </a:schemeClr>
+                </a:solidFill>
+              </a:rPr>
+              <a:t>~0.87</a:t>
+            </a:r>
+            <a:r>
+              <a:rPr sz="1900" dirty="0" smtClean="0"/>
+              <a:t>.</a:t>
+            </a:r>
+            <a:endParaRPr lang="en-US" sz="1900" dirty="0" smtClean="0"/>
+          </a:p>
+          <a:p>
+            <a:pPr algn="l">
+              <a:defRPr sz="1600" b="0">
+                <a:solidFill>
+                  <a:srgbClr val="F0F0F0"/>
+                </a:solidFill>
+                <a:latin typeface="Arial"/>
+              </a:defRPr>
+            </a:pPr>
+            <a:endParaRPr sz="1900" dirty="0"/>
           </a:p>
           <a:p>
             <a:pPr>
@@ -4461,8 +5899,14 @@
               </a:defRPr>
             </a:pPr>
             <a:r>
-              <a:t>User-CF and Item-CF models struggle on ranking accuracy (MAP@10) due to severe sparsity.</a:t>
-            </a:r>
+              <a:rPr sz="1900" dirty="0"/>
+              <a:t>User-CF and Item-CF models struggle on ranking accuracy (MAP@10) due to severe sparsity</a:t>
+            </a:r>
+            <a:r>
+              <a:rPr sz="1900" dirty="0" smtClean="0"/>
+              <a:t>.</a:t>
+            </a:r>
+            <a:endParaRPr lang="en-US" sz="1900" dirty="0" smtClean="0"/>
           </a:p>
           <a:p>
             <a:pPr>
@@ -4473,9 +5917,7 @@
                 <a:latin typeface="Arial"/>
               </a:defRPr>
             </a:pPr>
-            <a:r>
-              <a:t>NCF shows high expressiveness, capturing non-linear behavior, but is prone to overfitting and requires more tuning.</a:t>
-            </a:r>
+            <a:endParaRPr sz="1900" dirty="0"/>
           </a:p>
           <a:p>
             <a:pPr>
@@ -4487,6 +5929,37 @@
               </a:defRPr>
             </a:pPr>
             <a:r>
+              <a:rPr sz="1900" dirty="0"/>
+              <a:t>NCF shows high expressiveness, capturing non-linear behavior, but is prone to overfitting and requires more tuning</a:t>
+            </a:r>
+            <a:r>
+              <a:rPr sz="1900" dirty="0" smtClean="0"/>
+              <a:t>.</a:t>
+            </a:r>
+            <a:endParaRPr lang="en-US" sz="1900" dirty="0" smtClean="0"/>
+          </a:p>
+          <a:p>
+            <a:pPr>
+              <a:defRPr sz="1600">
+                <a:solidFill>
+                  <a:srgbClr val="F0F0F0"/>
+                </a:solidFill>
+                <a:latin typeface="Arial"/>
+              </a:defRPr>
+            </a:pPr>
+            <a:endParaRPr sz="1900" dirty="0"/>
+          </a:p>
+          <a:p>
+            <a:pPr>
+              <a:defRPr sz="1600">
+                <a:solidFill>
+                  <a:srgbClr val="F0F0F0"/>
+                </a:solidFill>
+                <a:latin typeface="Arial"/>
+              </a:defRPr>
+            </a:pPr>
+            <a:r>
+              <a:rPr sz="1900" dirty="0"/>
               <a:t>MAP@10 calculations strictly exclude seen training items, focusing purely on discovery quality.</a:t>
             </a:r>
           </a:p>
@@ -4498,11 +5971,17 @@
           <p:cNvGraphicFramePr>
             <a:graphicFrameLocks noGrp="1"/>
           </p:cNvGraphicFramePr>
-          <p:nvPr/>
+          <p:nvPr>
+            <p:extLst>
+              <p:ext uri="{D42A27DB-BD31-4B8C-83A1-F6EECF244321}">
+                <p14:modId xmlns:p14="http://schemas.microsoft.com/office/powerpoint/2010/main" val="473829431"/>
+              </p:ext>
+            </p:extLst>
+          </p:nvPr>
         </p:nvGraphicFramePr>
         <p:xfrm>
-          <a:off x="5486400" y="1645920"/>
-          <a:ext cx="6217920" cy="2011680"/>
+          <a:off x="5098472" y="1410393"/>
+          <a:ext cx="6605848" cy="2097024"/>
         </p:xfrm>
         <a:graphic>
           <a:graphicData uri="http://schemas.openxmlformats.org/drawingml/2006/table">
@@ -4511,11 +5990,11 @@
                 <a:tableStyleId>{5C22544A-7EE6-4342-B048-85BDC9FD1C3A}</a:tableStyleId>
               </a:tblPr>
               <a:tblGrid>
-                <a:gridCol w="1828800"/>
-                <a:gridCol w="1097280"/>
-                <a:gridCol w="1097280"/>
-                <a:gridCol w="1097280"/>
-                <a:gridCol w="1097280"/>
+                <a:gridCol w="1942896"/>
+                <a:gridCol w="1165738"/>
+                <a:gridCol w="1165738"/>
+                <a:gridCol w="1165738"/>
+                <a:gridCol w="1165738"/>
               </a:tblGrid>
               <a:tr h="402336">
                 <a:tc>
@@ -4532,11 +6011,19 @@
                         </a:defRPr>
                       </a:pPr>
                       <a:r>
+                        <a:rPr dirty="0"/>
                         <a:t>Model</a:t>
                       </a:r>
                     </a:p>
                   </a:txBody>
-                  <a:tcPr/>
+                  <a:tcPr>
+                    <a:solidFill>
+                      <a:schemeClr val="tx1">
+                        <a:lumMod val="75000"/>
+                        <a:lumOff val="25000"/>
+                      </a:schemeClr>
+                    </a:solidFill>
+                  </a:tcPr>
                 </a:tc>
                 <a:tc>
                   <a:txBody>
@@ -4552,11 +6039,19 @@
                         </a:defRPr>
                       </a:pPr>
                       <a:r>
+                        <a:rPr dirty="0"/>
                         <a:t>RMSE</a:t>
                       </a:r>
                     </a:p>
                   </a:txBody>
-                  <a:tcPr/>
+                  <a:tcPr>
+                    <a:solidFill>
+                      <a:schemeClr val="tx1">
+                        <a:lumMod val="75000"/>
+                        <a:lumOff val="25000"/>
+                      </a:schemeClr>
+                    </a:solidFill>
+                  </a:tcPr>
                 </a:tc>
                 <a:tc>
                   <a:txBody>
@@ -4572,11 +6067,19 @@
                         </a:defRPr>
                       </a:pPr>
                       <a:r>
+                        <a:rPr dirty="0"/>
                         <a:t>MAE</a:t>
                       </a:r>
                     </a:p>
                   </a:txBody>
-                  <a:tcPr/>
+                  <a:tcPr>
+                    <a:solidFill>
+                      <a:schemeClr val="tx1">
+                        <a:lumMod val="75000"/>
+                        <a:lumOff val="25000"/>
+                      </a:schemeClr>
+                    </a:solidFill>
+                  </a:tcPr>
                 </a:tc>
                 <a:tc>
                   <a:txBody>
@@ -4592,11 +6095,19 @@
                         </a:defRPr>
                       </a:pPr>
                       <a:r>
+                        <a:rPr dirty="0"/>
                         <a:t>Precision@10</a:t>
                       </a:r>
                     </a:p>
                   </a:txBody>
-                  <a:tcPr/>
+                  <a:tcPr>
+                    <a:solidFill>
+                      <a:schemeClr val="tx1">
+                        <a:lumMod val="75000"/>
+                        <a:lumOff val="25000"/>
+                      </a:schemeClr>
+                    </a:solidFill>
+                  </a:tcPr>
                 </a:tc>
                 <a:tc>
                   <a:txBody>
@@ -4612,11 +6123,19 @@
                         </a:defRPr>
                       </a:pPr>
                       <a:r>
+                        <a:rPr dirty="0"/>
                         <a:t>Recall@10</a:t>
                       </a:r>
                     </a:p>
                   </a:txBody>
-                  <a:tcPr/>
+                  <a:tcPr>
+                    <a:solidFill>
+                      <a:schemeClr val="tx1">
+                        <a:lumMod val="75000"/>
+                        <a:lumOff val="25000"/>
+                      </a:schemeClr>
+                    </a:solidFill>
+                  </a:tcPr>
                 </a:tc>
               </a:tr>
               <a:tr h="402336">
@@ -4638,7 +6157,14 @@
                       </a:r>
                     </a:p>
                   </a:txBody>
-                  <a:tcPr/>
+                  <a:tcPr>
+                    <a:solidFill>
+                      <a:schemeClr val="tx1">
+                        <a:lumMod val="95000"/>
+                        <a:lumOff val="5000"/>
+                      </a:schemeClr>
+                    </a:solidFill>
+                  </a:tcPr>
                 </a:tc>
                 <a:tc>
                   <a:txBody>
@@ -4654,11 +6180,19 @@
                         </a:defRPr>
                       </a:pPr>
                       <a:r>
+                        <a:rPr dirty="0"/>
                         <a:t>0.8712</a:t>
                       </a:r>
                     </a:p>
                   </a:txBody>
-                  <a:tcPr/>
+                  <a:tcPr>
+                    <a:solidFill>
+                      <a:schemeClr val="tx1">
+                        <a:lumMod val="95000"/>
+                        <a:lumOff val="5000"/>
+                      </a:schemeClr>
+                    </a:solidFill>
+                  </a:tcPr>
                 </a:tc>
                 <a:tc>
                   <a:txBody>
@@ -4678,7 +6212,14 @@
                       </a:r>
                     </a:p>
                   </a:txBody>
-                  <a:tcPr/>
+                  <a:tcPr>
+                    <a:solidFill>
+                      <a:schemeClr val="tx1">
+                        <a:lumMod val="95000"/>
+                        <a:lumOff val="5000"/>
+                      </a:schemeClr>
+                    </a:solidFill>
+                  </a:tcPr>
                 </a:tc>
                 <a:tc>
                   <a:txBody>
@@ -4698,7 +6239,14 @@
                       </a:r>
                     </a:p>
                   </a:txBody>
-                  <a:tcPr/>
+                  <a:tcPr>
+                    <a:solidFill>
+                      <a:schemeClr val="tx1">
+                        <a:lumMod val="95000"/>
+                        <a:lumOff val="5000"/>
+                      </a:schemeClr>
+                    </a:solidFill>
+                  </a:tcPr>
                 </a:tc>
                 <a:tc>
                   <a:txBody>
@@ -4718,7 +6266,14 @@
                       </a:r>
                     </a:p>
                   </a:txBody>
-                  <a:tcPr/>
+                  <a:tcPr>
+                    <a:solidFill>
+                      <a:schemeClr val="tx1">
+                        <a:lumMod val="95000"/>
+                        <a:lumOff val="5000"/>
+                      </a:schemeClr>
+                    </a:solidFill>
+                  </a:tcPr>
                 </a:tc>
               </a:tr>
               <a:tr h="402336">
@@ -4740,7 +6295,14 @@
                       </a:r>
                     </a:p>
                   </a:txBody>
-                  <a:tcPr/>
+                  <a:tcPr>
+                    <a:solidFill>
+                      <a:schemeClr val="tx1">
+                        <a:lumMod val="95000"/>
+                        <a:lumOff val="5000"/>
+                      </a:schemeClr>
+                    </a:solidFill>
+                  </a:tcPr>
                 </a:tc>
                 <a:tc>
                   <a:txBody>
@@ -4760,7 +6322,14 @@
                       </a:r>
                     </a:p>
                   </a:txBody>
-                  <a:tcPr/>
+                  <a:tcPr>
+                    <a:solidFill>
+                      <a:schemeClr val="tx1">
+                        <a:lumMod val="95000"/>
+                        <a:lumOff val="5000"/>
+                      </a:schemeClr>
+                    </a:solidFill>
+                  </a:tcPr>
                 </a:tc>
                 <a:tc>
                   <a:txBody>
@@ -4780,7 +6349,14 @@
                       </a:r>
                     </a:p>
                   </a:txBody>
-                  <a:tcPr/>
+                  <a:tcPr>
+                    <a:solidFill>
+                      <a:schemeClr val="tx1">
+                        <a:lumMod val="95000"/>
+                        <a:lumOff val="5000"/>
+                      </a:schemeClr>
+                    </a:solidFill>
+                  </a:tcPr>
                 </a:tc>
                 <a:tc>
                   <a:txBody>
@@ -4800,7 +6376,14 @@
                       </a:r>
                     </a:p>
                   </a:txBody>
-                  <a:tcPr/>
+                  <a:tcPr>
+                    <a:solidFill>
+                      <a:schemeClr val="tx1">
+                        <a:lumMod val="95000"/>
+                        <a:lumOff val="5000"/>
+                      </a:schemeClr>
+                    </a:solidFill>
+                  </a:tcPr>
                 </a:tc>
                 <a:tc>
                   <a:txBody>
@@ -4820,7 +6403,14 @@
                       </a:r>
                     </a:p>
                   </a:txBody>
-                  <a:tcPr/>
+                  <a:tcPr>
+                    <a:solidFill>
+                      <a:schemeClr val="tx1">
+                        <a:lumMod val="95000"/>
+                        <a:lumOff val="5000"/>
+                      </a:schemeClr>
+                    </a:solidFill>
+                  </a:tcPr>
                 </a:tc>
               </a:tr>
               <a:tr h="402336">
@@ -4838,11 +6428,19 @@
                         </a:defRPr>
                       </a:pPr>
                       <a:r>
+                        <a:rPr dirty="0"/>
                         <a:t>Item-Based CF</a:t>
                       </a:r>
                     </a:p>
                   </a:txBody>
-                  <a:tcPr/>
+                  <a:tcPr>
+                    <a:solidFill>
+                      <a:schemeClr val="tx1">
+                        <a:lumMod val="95000"/>
+                        <a:lumOff val="5000"/>
+                      </a:schemeClr>
+                    </a:solidFill>
+                  </a:tcPr>
                 </a:tc>
                 <a:tc>
                   <a:txBody>
@@ -4862,7 +6460,14 @@
                       </a:r>
                     </a:p>
                   </a:txBody>
-                  <a:tcPr/>
+                  <a:tcPr>
+                    <a:solidFill>
+                      <a:schemeClr val="tx1">
+                        <a:lumMod val="95000"/>
+                        <a:lumOff val="5000"/>
+                      </a:schemeClr>
+                    </a:solidFill>
+                  </a:tcPr>
                 </a:tc>
                 <a:tc>
                   <a:txBody>
@@ -4882,7 +6487,14 @@
                       </a:r>
                     </a:p>
                   </a:txBody>
-                  <a:tcPr/>
+                  <a:tcPr>
+                    <a:solidFill>
+                      <a:schemeClr val="tx1">
+                        <a:lumMod val="95000"/>
+                        <a:lumOff val="5000"/>
+                      </a:schemeClr>
+                    </a:solidFill>
+                  </a:tcPr>
                 </a:tc>
                 <a:tc>
                   <a:txBody>
@@ -4902,7 +6514,14 @@
                       </a:r>
                     </a:p>
                   </a:txBody>
-                  <a:tcPr/>
+                  <a:tcPr>
+                    <a:solidFill>
+                      <a:schemeClr val="tx1">
+                        <a:lumMod val="95000"/>
+                        <a:lumOff val="5000"/>
+                      </a:schemeClr>
+                    </a:solidFill>
+                  </a:tcPr>
                 </a:tc>
                 <a:tc>
                   <a:txBody>
@@ -4922,7 +6541,14 @@
                       </a:r>
                     </a:p>
                   </a:txBody>
-                  <a:tcPr/>
+                  <a:tcPr>
+                    <a:solidFill>
+                      <a:schemeClr val="tx1">
+                        <a:lumMod val="95000"/>
+                        <a:lumOff val="5000"/>
+                      </a:schemeClr>
+                    </a:solidFill>
+                  </a:tcPr>
                 </a:tc>
               </a:tr>
               <a:tr h="402336">
@@ -4944,7 +6570,14 @@
                       </a:r>
                     </a:p>
                   </a:txBody>
-                  <a:tcPr/>
+                  <a:tcPr>
+                    <a:solidFill>
+                      <a:schemeClr val="tx1">
+                        <a:lumMod val="95000"/>
+                        <a:lumOff val="5000"/>
+                      </a:schemeClr>
+                    </a:solidFill>
+                  </a:tcPr>
                 </a:tc>
                 <a:tc>
                   <a:txBody>
@@ -4964,7 +6597,14 @@
                       </a:r>
                     </a:p>
                   </a:txBody>
-                  <a:tcPr/>
+                  <a:tcPr>
+                    <a:solidFill>
+                      <a:schemeClr val="tx1">
+                        <a:lumMod val="95000"/>
+                        <a:lumOff val="5000"/>
+                      </a:schemeClr>
+                    </a:solidFill>
+                  </a:tcPr>
                 </a:tc>
                 <a:tc>
                   <a:txBody>
@@ -4984,7 +6624,14 @@
                       </a:r>
                     </a:p>
                   </a:txBody>
-                  <a:tcPr/>
+                  <a:tcPr>
+                    <a:solidFill>
+                      <a:schemeClr val="tx1">
+                        <a:lumMod val="95000"/>
+                        <a:lumOff val="5000"/>
+                      </a:schemeClr>
+                    </a:solidFill>
+                  </a:tcPr>
                 </a:tc>
                 <a:tc>
                   <a:txBody>
@@ -5004,7 +6651,14 @@
                       </a:r>
                     </a:p>
                   </a:txBody>
-                  <a:tcPr/>
+                  <a:tcPr>
+                    <a:solidFill>
+                      <a:schemeClr val="tx1">
+                        <a:lumMod val="95000"/>
+                        <a:lumOff val="5000"/>
+                      </a:schemeClr>
+                    </a:solidFill>
+                  </a:tcPr>
                 </a:tc>
                 <a:tc>
                   <a:txBody>
@@ -5020,11 +6674,19 @@
                         </a:defRPr>
                       </a:pPr>
                       <a:r>
+                        <a:rPr dirty="0"/>
                         <a:t>0.0768</a:t>
                       </a:r>
                     </a:p>
                   </a:txBody>
-                  <a:tcPr/>
+                  <a:tcPr>
+                    <a:solidFill>
+                      <a:schemeClr val="tx1">
+                        <a:lumMod val="95000"/>
+                        <a:lumOff val="5000"/>
+                      </a:schemeClr>
+                    </a:solidFill>
+                  </a:tcPr>
                 </a:tc>
               </a:tr>
             </a:tbl>
@@ -5047,8 +6709,8 @@
         </p:blipFill>
         <p:spPr>
           <a:xfrm>
-            <a:off x="5486400" y="3931920"/>
-            <a:ext cx="6217920" cy="2560320"/>
+            <a:off x="5089367" y="3768436"/>
+            <a:ext cx="6614953" cy="2723804"/>
           </a:xfrm>
           <a:prstGeom prst="rect">
             <a:avLst/>
@@ -5064,7 +6726,7 @@
 </file>
 
 <file path=ppt/slides/slide6.xml><?xml version="1.0" encoding="utf-8"?>
-<p:sld xmlns:a="http://schemas.openxmlformats.org/drawingml/2006/main" xmlns:p="http://schemas.openxmlformats.org/presentationml/2006/main" xmlns:r="http://schemas.openxmlformats.org/officeDocument/2006/relationships">
+<p:sld xmlns:a="http://schemas.openxmlformats.org/drawingml/2006/main" xmlns:r="http://schemas.openxmlformats.org/officeDocument/2006/relationships" xmlns:p="http://schemas.openxmlformats.org/presentationml/2006/main">
   <p:cSld>
     <p:bg>
       <p:bgPr>
@@ -5080,7 +6742,14 @@
         <p:cNvGrpSpPr/>
         <p:nvPr/>
       </p:nvGrpSpPr>
-      <p:grpSpPr/>
+      <p:grpSpPr>
+        <a:xfrm>
+          <a:off x="0" y="0"/>
+          <a:ext cx="0" cy="0"/>
+          <a:chOff x="0" y="0"/>
+          <a:chExt cx="0" cy="0"/>
+        </a:xfrm>
+      </p:grpSpPr>
       <p:sp>
         <p:nvSpPr>
           <p:cNvPr id="2" name="TextBox 1"/>
@@ -5090,7 +6759,7 @@
         <p:spPr>
           <a:xfrm>
             <a:off x="457200" y="457200"/>
-            <a:ext cx="11247120" cy="731520"/>
+            <a:ext cx="11247120" cy="646331"/>
           </a:xfrm>
           <a:prstGeom prst="rect">
             <a:avLst/>
@@ -5112,7 +6781,12 @@
               </a:defRPr>
             </a:pPr>
             <a:r>
-              <a:t>Qualitative Analysis: Success &amp; Failure Cases</a:t>
+              <a:rPr sz="3600" dirty="0"/>
+              <a:t>Qualitative</a:t>
+            </a:r>
+            <a:r>
+              <a:rPr dirty="0"/>
+              <a:t> Analysis: Success &amp; Failure Cases</a:t>
             </a:r>
           </a:p>
         </p:txBody>
@@ -5125,7 +6799,7 @@
         </p:nvSpPr>
         <p:spPr>
           <a:xfrm>
-            <a:off x="457200" y="1371600"/>
+            <a:off x="3460865" y="2743200"/>
             <a:ext cx="5486400" cy="4754880"/>
           </a:xfrm>
           <a:prstGeom prst="rect">
@@ -5147,6 +6821,7 @@
                 <a:latin typeface="Arial"/>
               </a:defRPr>
             </a:pPr>
+            <a:endParaRPr/>
           </a:p>
         </p:txBody>
       </p:sp>
@@ -5159,7 +6834,7 @@
         <p:spPr>
           <a:xfrm>
             <a:off x="457200" y="1371600"/>
-            <a:ext cx="5486400" cy="457200"/>
+            <a:ext cx="5486400" cy="430887"/>
           </a:xfrm>
           <a:prstGeom prst="rect">
             <a:avLst/>
@@ -5181,7 +6856,16 @@
               </a:defRPr>
             </a:pPr>
             <a:r>
-              <a:t>🎯 Success Case Analysis (Active Users)</a:t>
+              <a:rPr sz="2200" dirty="0" smtClean="0"/>
+              <a:t> </a:t>
+            </a:r>
+            <a:r>
+              <a:rPr sz="2200" dirty="0">
+                <a:solidFill>
+                  <a:srgbClr val="FF0000"/>
+                </a:solidFill>
+              </a:rPr>
+              <a:t>Success Case Analysis (Active Users)</a:t>
             </a:r>
           </a:p>
         </p:txBody>
@@ -5194,8 +6878,8 @@
         </p:nvSpPr>
         <p:spPr>
           <a:xfrm>
-            <a:off x="457200" y="2011680"/>
-            <a:ext cx="5486400" cy="4114800"/>
+            <a:off x="514350" y="1835051"/>
+            <a:ext cx="5486400" cy="4185761"/>
           </a:xfrm>
           <a:prstGeom prst="rect">
             <a:avLst/>
@@ -5217,8 +6901,25 @@
               </a:defRPr>
             </a:pPr>
             <a:r>
-              <a:t>Power users (50+ ratings) receive highly coherent recommendations.</a:t>
-            </a:r>
+              <a:rPr sz="1900" dirty="0"/>
+              <a:t>Power users (50+ ratings) receive highly coherent recommendations</a:t>
+            </a:r>
+            <a:r>
+              <a:rPr sz="1900" dirty="0" smtClean="0"/>
+              <a:t>.</a:t>
+            </a:r>
+            <a:endParaRPr lang="en-US" sz="1900" dirty="0" smtClean="0"/>
+          </a:p>
+          <a:p>
+            <a:pPr algn="l">
+              <a:defRPr sz="1600" b="0">
+                <a:solidFill>
+                  <a:srgbClr val="F0F0F0"/>
+                </a:solidFill>
+                <a:latin typeface="Arial"/>
+              </a:defRPr>
+            </a:pPr>
+            <a:endParaRPr sz="1900" dirty="0"/>
           </a:p>
           <a:p>
             <a:pPr>
@@ -5230,8 +6931,14 @@
               </a:defRPr>
             </a:pPr>
             <a:r>
-              <a:t>Example User 1488844: History shows heavy preference for epic fantasy and action (e.g., 'Lord of the Rings').</a:t>
-            </a:r>
+              <a:rPr sz="1900" dirty="0"/>
+              <a:t>Example User 1488844: History shows heavy preference for epic fantasy and action (e.g., 'Lord of the Rings</a:t>
+            </a:r>
+            <a:r>
+              <a:rPr sz="1900" dirty="0" smtClean="0"/>
+              <a:t>').</a:t>
+            </a:r>
+            <a:endParaRPr lang="en-US" sz="1900" dirty="0" smtClean="0"/>
           </a:p>
           <a:p>
             <a:pPr>
@@ -5242,9 +6949,7 @@
                 <a:latin typeface="Arial"/>
               </a:defRPr>
             </a:pPr>
-            <a:r>
-              <a:t>Model Recommendations: 'Gladiator' and 'The Matrix'.</a:t>
-            </a:r>
+            <a:endParaRPr sz="1900" dirty="0"/>
           </a:p>
           <a:p>
             <a:pPr>
@@ -5256,7 +6961,65 @@
               </a:defRPr>
             </a:pPr>
             <a:r>
-              <a:t>Diagnosis: SVD successfully captures the latent dimensions corresponding to cinematic style and genre preference.</a:t>
+              <a:rPr sz="1900" dirty="0"/>
+              <a:t>Model Recommendations: 'Gladiator' and 'The Matrix</a:t>
+            </a:r>
+            <a:r>
+              <a:rPr sz="1900" dirty="0" smtClean="0"/>
+              <a:t>'.</a:t>
+            </a:r>
+            <a:endParaRPr lang="en-US" sz="1900" dirty="0" smtClean="0"/>
+          </a:p>
+          <a:p>
+            <a:pPr>
+              <a:defRPr sz="1600">
+                <a:solidFill>
+                  <a:srgbClr val="F0F0F0"/>
+                </a:solidFill>
+                <a:latin typeface="Arial"/>
+              </a:defRPr>
+            </a:pPr>
+            <a:endParaRPr sz="1900" dirty="0"/>
+          </a:p>
+          <a:p>
+            <a:pPr>
+              <a:defRPr sz="1600">
+                <a:solidFill>
+                  <a:srgbClr val="F0F0F0"/>
+                </a:solidFill>
+                <a:latin typeface="Arial"/>
+              </a:defRPr>
+            </a:pPr>
+            <a:r>
+              <a:rPr sz="1900" dirty="0">
+                <a:solidFill>
+                  <a:srgbClr val="FF0000"/>
+                </a:solidFill>
+              </a:rPr>
+              <a:t>Diagnosis: </a:t>
+            </a:r>
+            <a:endParaRPr lang="en-US" sz="1900" dirty="0" smtClean="0">
+              <a:solidFill>
+                <a:srgbClr val="FF0000"/>
+              </a:solidFill>
+            </a:endParaRPr>
+          </a:p>
+          <a:p>
+            <a:pPr>
+              <a:defRPr sz="1600">
+                <a:solidFill>
+                  <a:srgbClr val="F0F0F0"/>
+                </a:solidFill>
+                <a:latin typeface="Arial"/>
+              </a:defRPr>
+            </a:pPr>
+            <a:r>
+              <a:rPr sz="1900" dirty="0" smtClean="0"/>
+              <a:t>SVD </a:t>
+            </a:r>
+            <a:r>
+              <a:rPr sz="1900" dirty="0"/>
+              <a:t>successfully captures the latent dimensions corresponding to cinematic style and genre preference.</a:t>
             </a:r>
           </a:p>
         </p:txBody>
@@ -5291,6 +7054,7 @@
                 <a:latin typeface="Arial"/>
               </a:defRPr>
             </a:pPr>
+            <a:endParaRPr/>
           </a:p>
         </p:txBody>
       </p:sp>
@@ -5303,7 +7067,7 @@
         <p:spPr>
           <a:xfrm>
             <a:off x="6217920" y="1371600"/>
-            <a:ext cx="5486400" cy="457200"/>
+            <a:ext cx="5486400" cy="430887"/>
           </a:xfrm>
           <a:prstGeom prst="rect">
             <a:avLst/>
@@ -5325,7 +7089,20 @@
               </a:defRPr>
             </a:pPr>
             <a:r>
-              <a:t>⚠️ Failure Case Analysis &amp; Diagnostics</a:t>
+              <a:rPr sz="2200" dirty="0" smtClean="0">
+                <a:solidFill>
+                  <a:srgbClr val="FF0000"/>
+                </a:solidFill>
+              </a:rPr>
+              <a:t> </a:t>
+            </a:r>
+            <a:r>
+              <a:rPr sz="2200" dirty="0">
+                <a:solidFill>
+                  <a:srgbClr val="FF0000"/>
+                </a:solidFill>
+              </a:rPr>
+              <a:t>Failure Case Analysis &amp; Diagnostics</a:t>
             </a:r>
           </a:p>
         </p:txBody>
@@ -5338,8 +7115,8 @@
         </p:nvSpPr>
         <p:spPr>
           <a:xfrm>
-            <a:off x="6217920" y="2011680"/>
-            <a:ext cx="5486400" cy="4114800"/>
+            <a:off x="6217920" y="1871603"/>
+            <a:ext cx="5486400" cy="4185761"/>
           </a:xfrm>
           <a:prstGeom prst="rect">
             <a:avLst/>
@@ -5361,8 +7138,25 @@
               </a:defRPr>
             </a:pPr>
             <a:r>
-              <a:t>New Users (&lt;5 ratings) suffer from Cold Start issues. The model defaults to popular items.</a:t>
-            </a:r>
+              <a:rPr sz="1900" dirty="0"/>
+              <a:t>New Users (&lt;5 ratings) suffer from Cold Start issues. The model defaults to popular items</a:t>
+            </a:r>
+            <a:r>
+              <a:rPr sz="1900" dirty="0" smtClean="0"/>
+              <a:t>.</a:t>
+            </a:r>
+            <a:endParaRPr lang="en-US" sz="1900" dirty="0" smtClean="0"/>
+          </a:p>
+          <a:p>
+            <a:pPr algn="l">
+              <a:defRPr sz="1600" b="0">
+                <a:solidFill>
+                  <a:srgbClr val="F0F0F0"/>
+                </a:solidFill>
+                <a:latin typeface="Arial"/>
+              </a:defRPr>
+            </a:pPr>
+            <a:endParaRPr sz="1900" dirty="0"/>
           </a:p>
           <a:p>
             <a:pPr>
@@ -5374,8 +7168,14 @@
               </a:defRPr>
             </a:pPr>
             <a:r>
-              <a:t>Users with highly niche preferences (e.g. obscure documentaries) receive generic blockbuster suggestions.</a:t>
-            </a:r>
+              <a:rPr sz="1900" dirty="0"/>
+              <a:t>Users with highly niche preferences (e.g. obscure documentaries) receive generic blockbuster suggestions</a:t>
+            </a:r>
+            <a:r>
+              <a:rPr sz="1900" dirty="0" smtClean="0"/>
+              <a:t>.</a:t>
+            </a:r>
+            <a:endParaRPr lang="en-US" sz="1900" dirty="0" smtClean="0"/>
           </a:p>
           <a:p>
             <a:pPr>
@@ -5386,9 +7186,7 @@
                 <a:latin typeface="Arial"/>
               </a:defRPr>
             </a:pPr>
-            <a:r>
-              <a:t>Diagnosed Popularity Bias: Blockbusters are recommended 5x more frequently than long-tail films.</a:t>
-            </a:r>
+            <a:endParaRPr sz="1900" dirty="0"/>
           </a:p>
           <a:p>
             <a:pPr>
@@ -5400,7 +7198,73 @@
               </a:defRPr>
             </a:pPr>
             <a:r>
-              <a:t>Remedy: Blend collaborative signals with content embeddings or implement popularity penalties.</a:t>
+              <a:rPr sz="1900" dirty="0"/>
+              <a:t>Diagnosed Popularity Bias: Blockbusters are recommended 5x more frequently than long-tail films</a:t>
+            </a:r>
+            <a:r>
+              <a:rPr sz="1900" dirty="0" smtClean="0"/>
+              <a:t>.</a:t>
+            </a:r>
+            <a:endParaRPr lang="en-US" sz="1900" dirty="0" smtClean="0"/>
+          </a:p>
+          <a:p>
+            <a:pPr>
+              <a:defRPr sz="1600">
+                <a:solidFill>
+                  <a:srgbClr val="F0F0F0"/>
+                </a:solidFill>
+                <a:latin typeface="Arial"/>
+              </a:defRPr>
+            </a:pPr>
+            <a:endParaRPr sz="1900" dirty="0"/>
+          </a:p>
+          <a:p>
+            <a:pPr>
+              <a:defRPr sz="1600">
+                <a:solidFill>
+                  <a:srgbClr val="F0F0F0"/>
+                </a:solidFill>
+                <a:latin typeface="Arial"/>
+              </a:defRPr>
+            </a:pPr>
+            <a:r>
+              <a:rPr sz="1900" dirty="0">
+                <a:solidFill>
+                  <a:srgbClr val="FF0000"/>
+                </a:solidFill>
+              </a:rPr>
+              <a:t>Remedy: </a:t>
+            </a:r>
+            <a:endParaRPr lang="en-US" sz="1900" dirty="0" smtClean="0">
+              <a:solidFill>
+                <a:srgbClr val="FF0000"/>
+              </a:solidFill>
+            </a:endParaRPr>
+          </a:p>
+          <a:p>
+            <a:pPr>
+              <a:defRPr sz="1600">
+                <a:solidFill>
+                  <a:srgbClr val="F0F0F0"/>
+                </a:solidFill>
+                <a:latin typeface="Arial"/>
+              </a:defRPr>
+            </a:pPr>
+            <a:r>
+              <a:rPr sz="1900" dirty="0" smtClean="0"/>
+              <a:t>Blend </a:t>
+            </a:r>
+            <a:r>
+              <a:rPr sz="1900" dirty="0"/>
+              <a:t>collaborative signals with content </a:t>
+            </a:r>
+            <a:r>
+              <a:rPr sz="1900" dirty="0" err="1"/>
+              <a:t>embeddings</a:t>
+            </a:r>
+            <a:r>
+              <a:rPr sz="1900" dirty="0"/>
+              <a:t> or implement popularity penalties.</a:t>
             </a:r>
           </a:p>
         </p:txBody>
@@ -5414,7 +7278,7 @@
 </file>
 
 <file path=ppt/slides/slide7.xml><?xml version="1.0" encoding="utf-8"?>
-<p:sld xmlns:a="http://schemas.openxmlformats.org/drawingml/2006/main" xmlns:p="http://schemas.openxmlformats.org/presentationml/2006/main" xmlns:r="http://schemas.openxmlformats.org/officeDocument/2006/relationships">
+<p:sld xmlns:a="http://schemas.openxmlformats.org/drawingml/2006/main" xmlns:r="http://schemas.openxmlformats.org/officeDocument/2006/relationships" xmlns:p="http://schemas.openxmlformats.org/presentationml/2006/main">
   <p:cSld>
     <p:bg>
       <p:bgPr>
@@ -5430,7 +7294,14 @@
         <p:cNvGrpSpPr/>
         <p:nvPr/>
       </p:nvGrpSpPr>
-      <p:grpSpPr/>
+      <p:grpSpPr>
+        <a:xfrm>
+          <a:off x="0" y="0"/>
+          <a:ext cx="0" cy="0"/>
+          <a:chOff x="0" y="0"/>
+          <a:chExt cx="0" cy="0"/>
+        </a:xfrm>
+      </p:grpSpPr>
       <p:sp>
         <p:nvSpPr>
           <p:cNvPr id="2" name="TextBox 1"/>
@@ -5440,7 +7311,7 @@
         <p:spPr>
           <a:xfrm>
             <a:off x="457200" y="457200"/>
-            <a:ext cx="11247120" cy="731520"/>
+            <a:ext cx="11247120" cy="646331"/>
           </a:xfrm>
           <a:prstGeom prst="rect">
             <a:avLst/>
@@ -5462,6 +7333,7 @@
               </a:defRPr>
             </a:pPr>
             <a:r>
+              <a:rPr sz="3600" dirty="0"/>
               <a:t>Innovation &amp; Engineering Highlights</a:t>
             </a:r>
           </a:p>
@@ -5476,7 +7348,7 @@
         <p:spPr>
           <a:xfrm>
             <a:off x="457200" y="1371600"/>
-            <a:ext cx="11247120" cy="4572000"/>
+            <a:ext cx="11247120" cy="4670509"/>
           </a:xfrm>
           <a:prstGeom prst="rect">
             <a:avLst/>
@@ -5498,7 +7370,67 @@
               </a:defRPr>
             </a:pPr>
             <a:r>
-              <a:t>⭐ Neural Collaborative Filtering (PyTorch NCF): Replaced standard dot products with multi-layer dense networks to capture complex user-movie non-linearities.</a:t>
+              <a:rPr sz="1750" dirty="0" smtClean="0">
+                <a:solidFill>
+                  <a:srgbClr val="FF0000"/>
+                </a:solidFill>
+              </a:rPr>
+              <a:t>Neural </a:t>
+            </a:r>
+            <a:r>
+              <a:rPr sz="1750" dirty="0">
+                <a:solidFill>
+                  <a:srgbClr val="FF0000"/>
+                </a:solidFill>
+              </a:rPr>
+              <a:t>Collaborative Filtering (</a:t>
+            </a:r>
+            <a:r>
+              <a:rPr sz="1750" dirty="0" err="1">
+                <a:solidFill>
+                  <a:srgbClr val="FF0000"/>
+                </a:solidFill>
+              </a:rPr>
+              <a:t>PyTorch</a:t>
+            </a:r>
+            <a:r>
+              <a:rPr sz="1750" dirty="0">
+                <a:solidFill>
+                  <a:srgbClr val="FF0000"/>
+                </a:solidFill>
+              </a:rPr>
+              <a:t> NCF): </a:t>
+            </a:r>
+            <a:endParaRPr lang="en-US" sz="1750" dirty="0" smtClean="0">
+              <a:solidFill>
+                <a:srgbClr val="FF0000"/>
+              </a:solidFill>
+            </a:endParaRPr>
+          </a:p>
+          <a:p>
+            <a:pPr algn="l">
+              <a:defRPr sz="1600" b="0">
+                <a:solidFill>
+                  <a:srgbClr val="F0F0F0"/>
+                </a:solidFill>
+                <a:latin typeface="Arial"/>
+              </a:defRPr>
+            </a:pPr>
+            <a:r>
+              <a:rPr sz="1750" dirty="0" smtClean="0"/>
+              <a:t>Replaced </a:t>
+            </a:r>
+            <a:r>
+              <a:rPr sz="1750" dirty="0"/>
+              <a:t>standard dot products with multi-layer dense networks to capture complex user-movie non-</a:t>
+            </a:r>
+            <a:r>
+              <a:rPr sz="1750" dirty="0" err="1"/>
+              <a:t>linearities</a:t>
+            </a:r>
+            <a:r>
+              <a:rPr sz="1750" dirty="0"/>
+              <a:t>.</a:t>
             </a:r>
           </a:p>
           <a:p>
@@ -5510,9 +7442,7 @@
                 <a:latin typeface="Arial"/>
               </a:defRPr>
             </a:pPr>
-            <a:r>
-              <a:t>💡 Explainable Recommendations: Designed custom similarity logic mapping recommended movies back to the user's high-rated history, providing clean reasons for recommendations (e.g., 'Recommended because you liked X').</a:t>
-            </a:r>
+            <a:endParaRPr lang="en-US" sz="1750" dirty="0" smtClean="0"/>
           </a:p>
           <a:p>
             <a:pPr>
@@ -5524,8 +7454,26 @@
               </a:defRPr>
             </a:pPr>
             <a:r>
-              <a:t>🎨 Premium Dark-Mode Streamlit Dashboard: Created a complete, interactive, cached, dark-mode user interface replicating Netflix's interface style. Features recommendation testing, a movie explorer, and performance plots.</a:t>
-            </a:r>
+              <a:rPr sz="1750" dirty="0" smtClean="0">
+                <a:solidFill>
+                  <a:srgbClr val="FF0000"/>
+                </a:solidFill>
+              </a:rPr>
+              <a:t>Explainable </a:t>
+            </a:r>
+            <a:r>
+              <a:rPr sz="1750" dirty="0">
+                <a:solidFill>
+                  <a:srgbClr val="FF0000"/>
+                </a:solidFill>
+              </a:rPr>
+              <a:t>Recommendations: </a:t>
+            </a:r>
+            <a:endParaRPr lang="en-US" sz="1750" dirty="0" smtClean="0">
+              <a:solidFill>
+                <a:srgbClr val="FF0000"/>
+              </a:solidFill>
+            </a:endParaRPr>
           </a:p>
           <a:p>
             <a:pPr>
@@ -5537,8 +7485,18 @@
               </a:defRPr>
             </a:pPr>
             <a:r>
-              <a:t>📈 Evaluation Optimization: Implemented custom batch predictors for NCF, speeding up calculation of ranking-based metrics like MAP@10 by 20x.</a:t>
-            </a:r>
+              <a:rPr sz="1750" dirty="0" smtClean="0"/>
+              <a:t>Designed </a:t>
+            </a:r>
+            <a:r>
+              <a:rPr sz="1750" dirty="0"/>
+              <a:t>custom similarity logic mapping recommended movies back to the user's high-rated history, providing clean reasons for recommendations (e.g., 'Recommended because you liked X</a:t>
+            </a:r>
+            <a:r>
+              <a:rPr sz="1750" dirty="0" smtClean="0"/>
+              <a:t>').</a:t>
+            </a:r>
+            <a:endParaRPr lang="en-US" sz="1750" dirty="0" smtClean="0"/>
           </a:p>
           <a:p>
             <a:pPr>
@@ -5549,8 +7507,191 @@
                 <a:latin typeface="Arial"/>
               </a:defRPr>
             </a:pPr>
-            <a:r>
-              <a:t>⚡ Safe CF Training: Leveraged sampling strategies to train memory-based models without running out of RAM.</a:t>
+            <a:endParaRPr sz="1750" dirty="0"/>
+          </a:p>
+          <a:p>
+            <a:pPr>
+              <a:defRPr sz="1600">
+                <a:solidFill>
+                  <a:srgbClr val="F0F0F0"/>
+                </a:solidFill>
+                <a:latin typeface="Arial"/>
+              </a:defRPr>
+            </a:pPr>
+            <a:r>
+              <a:rPr sz="1750" dirty="0" smtClean="0">
+                <a:solidFill>
+                  <a:srgbClr val="FF0000"/>
+                </a:solidFill>
+              </a:rPr>
+              <a:t>Premium </a:t>
+            </a:r>
+            <a:r>
+              <a:rPr sz="1750" dirty="0">
+                <a:solidFill>
+                  <a:srgbClr val="FF0000"/>
+                </a:solidFill>
+              </a:rPr>
+              <a:t>Dark-Mode </a:t>
+            </a:r>
+            <a:r>
+              <a:rPr sz="1750" dirty="0" err="1">
+                <a:solidFill>
+                  <a:srgbClr val="FF0000"/>
+                </a:solidFill>
+              </a:rPr>
+              <a:t>Streamlit</a:t>
+            </a:r>
+            <a:r>
+              <a:rPr sz="1750" dirty="0">
+                <a:solidFill>
+                  <a:srgbClr val="FF0000"/>
+                </a:solidFill>
+              </a:rPr>
+              <a:t> Dashboard: </a:t>
+            </a:r>
+            <a:endParaRPr lang="en-US" sz="1750" dirty="0" smtClean="0">
+              <a:solidFill>
+                <a:srgbClr val="FF0000"/>
+              </a:solidFill>
+            </a:endParaRPr>
+          </a:p>
+          <a:p>
+            <a:pPr>
+              <a:defRPr sz="1600">
+                <a:solidFill>
+                  <a:srgbClr val="F0F0F0"/>
+                </a:solidFill>
+                <a:latin typeface="Arial"/>
+              </a:defRPr>
+            </a:pPr>
+            <a:r>
+              <a:rPr sz="1750" dirty="0" smtClean="0"/>
+              <a:t>Created </a:t>
+            </a:r>
+            <a:r>
+              <a:rPr sz="1750" dirty="0"/>
+              <a:t>a complete, interactive, cached, dark-mode user interface replicating Netflix's interface style. Features recommendation testing, a movie explorer, and performance plots.</a:t>
+            </a:r>
+          </a:p>
+          <a:p>
+            <a:pPr>
+              <a:defRPr sz="1600">
+                <a:solidFill>
+                  <a:srgbClr val="F0F0F0"/>
+                </a:solidFill>
+                <a:latin typeface="Arial"/>
+              </a:defRPr>
+            </a:pPr>
+            <a:endParaRPr lang="en-US" sz="1750" dirty="0" smtClean="0"/>
+          </a:p>
+          <a:p>
+            <a:pPr>
+              <a:defRPr sz="1600">
+                <a:solidFill>
+                  <a:srgbClr val="F0F0F0"/>
+                </a:solidFill>
+                <a:latin typeface="Arial"/>
+              </a:defRPr>
+            </a:pPr>
+            <a:r>
+              <a:rPr sz="1750" dirty="0" smtClean="0">
+                <a:solidFill>
+                  <a:srgbClr val="FF0000"/>
+                </a:solidFill>
+              </a:rPr>
+              <a:t>Evaluation </a:t>
+            </a:r>
+            <a:r>
+              <a:rPr sz="1750" dirty="0">
+                <a:solidFill>
+                  <a:srgbClr val="FF0000"/>
+                </a:solidFill>
+              </a:rPr>
+              <a:t>Optimization: </a:t>
+            </a:r>
+            <a:endParaRPr lang="en-US" sz="1750" dirty="0" smtClean="0">
+              <a:solidFill>
+                <a:srgbClr val="FF0000"/>
+              </a:solidFill>
+            </a:endParaRPr>
+          </a:p>
+          <a:p>
+            <a:pPr>
+              <a:defRPr sz="1600">
+                <a:solidFill>
+                  <a:srgbClr val="F0F0F0"/>
+                </a:solidFill>
+                <a:latin typeface="Arial"/>
+              </a:defRPr>
+            </a:pPr>
+            <a:r>
+              <a:rPr sz="1750" dirty="0" smtClean="0"/>
+              <a:t>Implemented </a:t>
+            </a:r>
+            <a:r>
+              <a:rPr sz="1750" dirty="0"/>
+              <a:t>custom batch predictors for NCF, speeding up calculation of ranking-based metrics like MAP@10 by 20x.</a:t>
+            </a:r>
+          </a:p>
+          <a:p>
+            <a:pPr>
+              <a:defRPr sz="1600">
+                <a:solidFill>
+                  <a:srgbClr val="F0F0F0"/>
+                </a:solidFill>
+                <a:latin typeface="Arial"/>
+              </a:defRPr>
+            </a:pPr>
+            <a:endParaRPr lang="en-US" sz="1750" dirty="0"/>
+          </a:p>
+          <a:p>
+            <a:pPr>
+              <a:defRPr sz="1600">
+                <a:solidFill>
+                  <a:srgbClr val="F0F0F0"/>
+                </a:solidFill>
+                <a:latin typeface="Arial"/>
+              </a:defRPr>
+            </a:pPr>
+            <a:r>
+              <a:rPr sz="1750" dirty="0" smtClean="0">
+                <a:solidFill>
+                  <a:srgbClr val="FF0000"/>
+                </a:solidFill>
+              </a:rPr>
+              <a:t>Safe </a:t>
+            </a:r>
+            <a:r>
+              <a:rPr sz="1750" dirty="0">
+                <a:solidFill>
+                  <a:srgbClr val="FF0000"/>
+                </a:solidFill>
+              </a:rPr>
+              <a:t>CF Training: </a:t>
+            </a:r>
+            <a:endParaRPr lang="en-US" sz="1750" dirty="0" smtClean="0">
+              <a:solidFill>
+                <a:srgbClr val="FF0000"/>
+              </a:solidFill>
+            </a:endParaRPr>
+          </a:p>
+          <a:p>
+            <a:pPr>
+              <a:defRPr sz="1600">
+                <a:solidFill>
+                  <a:srgbClr val="F0F0F0"/>
+                </a:solidFill>
+                <a:latin typeface="Arial"/>
+              </a:defRPr>
+            </a:pPr>
+            <a:r>
+              <a:rPr sz="1750" dirty="0" smtClean="0"/>
+              <a:t>Leveraged </a:t>
+            </a:r>
+            <a:r>
+              <a:rPr sz="1750" dirty="0"/>
+              <a:t>sampling strategies to train memory-based models without running out of RAM.</a:t>
             </a:r>
           </a:p>
         </p:txBody>
@@ -5564,7 +7705,7 @@
 </file>
 
 <file path=ppt/slides/slide8.xml><?xml version="1.0" encoding="utf-8"?>
-<p:sld xmlns:a="http://schemas.openxmlformats.org/drawingml/2006/main" xmlns:p="http://schemas.openxmlformats.org/presentationml/2006/main" xmlns:r="http://schemas.openxmlformats.org/officeDocument/2006/relationships">
+<p:sld xmlns:a="http://schemas.openxmlformats.org/drawingml/2006/main" xmlns:r="http://schemas.openxmlformats.org/officeDocument/2006/relationships" xmlns:p="http://schemas.openxmlformats.org/presentationml/2006/main">
   <p:cSld>
     <p:bg>
       <p:bgPr>
@@ -5580,7 +7721,14 @@
         <p:cNvGrpSpPr/>
         <p:nvPr/>
       </p:nvGrpSpPr>
-      <p:grpSpPr/>
+      <p:grpSpPr>
+        <a:xfrm>
+          <a:off x="0" y="0"/>
+          <a:ext cx="0" cy="0"/>
+          <a:chOff x="0" y="0"/>
+          <a:chExt cx="0" cy="0"/>
+        </a:xfrm>
+      </p:grpSpPr>
       <p:sp>
         <p:nvSpPr>
           <p:cNvPr id="2" name="TextBox 1"/>
@@ -5626,7 +7774,7 @@
         <p:spPr>
           <a:xfrm>
             <a:off x="457200" y="1371600"/>
-            <a:ext cx="11247120" cy="4572000"/>
+            <a:ext cx="11247120" cy="4585871"/>
           </a:xfrm>
           <a:prstGeom prst="rect">
             <a:avLst/>
@@ -5648,8 +7796,37 @@
               </a:defRPr>
             </a:pPr>
             <a:r>
-              <a:t>Key Accomplishments:</a:t>
-            </a:r>
+              <a:rPr sz="2000" dirty="0">
+                <a:solidFill>
+                  <a:srgbClr val="FF0000"/>
+                </a:solidFill>
+              </a:rPr>
+              <a:t>Key Accomplishments</a:t>
+            </a:r>
+            <a:r>
+              <a:rPr sz="2000" dirty="0" smtClean="0">
+                <a:solidFill>
+                  <a:srgbClr val="FF0000"/>
+                </a:solidFill>
+              </a:rPr>
+              <a:t>:</a:t>
+            </a:r>
+            <a:endParaRPr lang="en-US" sz="2000" dirty="0" smtClean="0">
+              <a:solidFill>
+                <a:srgbClr val="FF0000"/>
+              </a:solidFill>
+            </a:endParaRPr>
+          </a:p>
+          <a:p>
+            <a:pPr algn="l">
+              <a:defRPr sz="1600" b="0">
+                <a:solidFill>
+                  <a:srgbClr val="F0F0F0"/>
+                </a:solidFill>
+                <a:latin typeface="Arial"/>
+              </a:defRPr>
+            </a:pPr>
+            <a:endParaRPr dirty="0"/>
           </a:p>
           <a:p>
             <a:pPr>
@@ -5661,8 +7838,14 @@
               </a:defRPr>
             </a:pPr>
             <a:r>
-              <a:t>  - Built a complete, production-ready, modular recommendation framework running end-to-end.</a:t>
-            </a:r>
+              <a:rPr dirty="0"/>
+              <a:t>  - Built a complete, production-ready, modular recommendation framework running end-to-end</a:t>
+            </a:r>
+            <a:r>
+              <a:rPr dirty="0" smtClean="0"/>
+              <a:t>.</a:t>
+            </a:r>
+            <a:endParaRPr lang="en-US" dirty="0" smtClean="0"/>
           </a:p>
           <a:p>
             <a:pPr>
@@ -5673,9 +7856,7 @@
                 <a:latin typeface="Arial"/>
               </a:defRPr>
             </a:pPr>
-            <a:r>
-              <a:t>  - Evaluated SVD, Collaborative Filtering, and Neural architectures on identical data configurations.</a:t>
-            </a:r>
+            <a:endParaRPr dirty="0"/>
           </a:p>
           <a:p>
             <a:pPr>
@@ -5687,8 +7868,14 @@
               </a:defRPr>
             </a:pPr>
             <a:r>
-              <a:t>  - SVD achieves the best balance of ranking accuracy (MAP@10) and computational efficiency.</a:t>
-            </a:r>
+              <a:rPr dirty="0"/>
+              <a:t>  - Evaluated SVD, Collaborative Filtering, and Neural architectures on identical data configurations</a:t>
+            </a:r>
+            <a:r>
+              <a:rPr dirty="0" smtClean="0"/>
+              <a:t>.</a:t>
+            </a:r>
+            <a:endParaRPr lang="en-US" dirty="0" smtClean="0"/>
           </a:p>
           <a:p>
             <a:pPr>
@@ -5699,9 +7886,7 @@
                 <a:latin typeface="Arial"/>
               </a:defRPr>
             </a:pPr>
-            <a:r>
-              <a:t>Recommended Next Steps for Production:</a:t>
-            </a:r>
+            <a:endParaRPr lang="en-US" dirty="0" smtClean="0"/>
           </a:p>
           <a:p>
             <a:pPr>
@@ -5712,9 +7897,7 @@
                 <a:latin typeface="Arial"/>
               </a:defRPr>
             </a:pPr>
-            <a:r>
-              <a:t>  - Hybrid Recommendations: Combine SVD embeddings with content-based features (e.g. genre/keywords).</a:t>
-            </a:r>
+            <a:endParaRPr dirty="0"/>
           </a:p>
           <a:p>
             <a:pPr>
@@ -5726,7 +7909,8 @@
               </a:defRPr>
             </a:pPr>
             <a:r>
-              <a:t>  - Temporal Biases: Integrate temporal decaying features (give more weight to recent user tastes).</a:t>
+              <a:rPr dirty="0"/>
+              <a:t>  - SVD achieves the best balance of ranking accuracy (MAP@10) and computational efficiency.</a:t>
             </a:r>
           </a:p>
           <a:p>
@@ -5739,8 +7923,14 @@
               </a:defRPr>
             </a:pPr>
             <a:r>
-              <a:t>  - Sequence-Based recommendations: Implement RNNs/Transformers (e.g., GRU4Rec) to capture session-based transitions.</a:t>
-            </a:r>
+              <a:rPr dirty="0"/>
+              <a:t>Recommended Next Steps for Production</a:t>
+            </a:r>
+            <a:r>
+              <a:rPr dirty="0" smtClean="0"/>
+              <a:t>:</a:t>
+            </a:r>
+            <a:endParaRPr lang="en-US" dirty="0" smtClean="0"/>
           </a:p>
           <a:p>
             <a:pPr>
@@ -5751,8 +7941,126 @@
                 <a:latin typeface="Arial"/>
               </a:defRPr>
             </a:pPr>
-            <a:r>
-              <a:t>  - Reinforcement Learning (Bandits): Use contextual bandits to continuously trade-off exploration vs exploitation.</a:t>
+            <a:endParaRPr dirty="0"/>
+          </a:p>
+          <a:p>
+            <a:pPr>
+              <a:defRPr sz="1600">
+                <a:solidFill>
+                  <a:srgbClr val="F0F0F0"/>
+                </a:solidFill>
+                <a:latin typeface="Arial"/>
+              </a:defRPr>
+            </a:pPr>
+            <a:r>
+              <a:rPr dirty="0"/>
+              <a:t>  - Hybrid Recommendations: Combine SVD </a:t>
+            </a:r>
+            <a:r>
+              <a:rPr dirty="0" err="1"/>
+              <a:t>embeddings</a:t>
+            </a:r>
+            <a:r>
+              <a:rPr dirty="0"/>
+              <a:t> with content-based features (e.g. genre/keywords</a:t>
+            </a:r>
+            <a:r>
+              <a:rPr dirty="0" smtClean="0"/>
+              <a:t>).</a:t>
+            </a:r>
+            <a:endParaRPr lang="en-US" dirty="0" smtClean="0"/>
+          </a:p>
+          <a:p>
+            <a:pPr>
+              <a:defRPr sz="1600">
+                <a:solidFill>
+                  <a:srgbClr val="F0F0F0"/>
+                </a:solidFill>
+                <a:latin typeface="Arial"/>
+              </a:defRPr>
+            </a:pPr>
+            <a:endParaRPr dirty="0"/>
+          </a:p>
+          <a:p>
+            <a:pPr>
+              <a:defRPr sz="1600">
+                <a:solidFill>
+                  <a:srgbClr val="F0F0F0"/>
+                </a:solidFill>
+                <a:latin typeface="Arial"/>
+              </a:defRPr>
+            </a:pPr>
+            <a:r>
+              <a:rPr dirty="0"/>
+              <a:t>  - Temporal Biases: Integrate temporal decaying features (give more weight to recent user tastes</a:t>
+            </a:r>
+            <a:r>
+              <a:rPr dirty="0" smtClean="0"/>
+              <a:t>).</a:t>
+            </a:r>
+            <a:endParaRPr lang="en-US" dirty="0" smtClean="0"/>
+          </a:p>
+          <a:p>
+            <a:pPr>
+              <a:defRPr sz="1600">
+                <a:solidFill>
+                  <a:srgbClr val="F0F0F0"/>
+                </a:solidFill>
+                <a:latin typeface="Arial"/>
+              </a:defRPr>
+            </a:pPr>
+            <a:endParaRPr dirty="0"/>
+          </a:p>
+          <a:p>
+            <a:pPr>
+              <a:defRPr sz="1600">
+                <a:solidFill>
+                  <a:srgbClr val="F0F0F0"/>
+                </a:solidFill>
+                <a:latin typeface="Arial"/>
+              </a:defRPr>
+            </a:pPr>
+            <a:r>
+              <a:rPr dirty="0"/>
+              <a:t>  - Sequence-Based recommendations: Implement RNNs/Transformers (e.g., GRU4Rec) to capture session-based transitions</a:t>
+            </a:r>
+            <a:r>
+              <a:rPr dirty="0" smtClean="0"/>
+              <a:t>.</a:t>
+            </a:r>
+            <a:endParaRPr lang="en-US" dirty="0" smtClean="0"/>
+          </a:p>
+          <a:p>
+            <a:pPr>
+              <a:defRPr sz="1600">
+                <a:solidFill>
+                  <a:srgbClr val="F0F0F0"/>
+                </a:solidFill>
+                <a:latin typeface="Arial"/>
+              </a:defRPr>
+            </a:pPr>
+            <a:endParaRPr dirty="0"/>
+          </a:p>
+          <a:p>
+            <a:pPr>
+              <a:defRPr sz="1600">
+                <a:solidFill>
+                  <a:srgbClr val="F0F0F0"/>
+                </a:solidFill>
+                <a:latin typeface="Arial"/>
+              </a:defRPr>
+            </a:pPr>
+            <a:r>
+              <a:rPr dirty="0"/>
+              <a:t>  - Reinforcement Learning (Bandits): Use contextual bandits to continuously trade-off exploration </a:t>
+            </a:r>
+            <a:r>
+              <a:rPr dirty="0" err="1"/>
+              <a:t>vs</a:t>
+            </a:r>
+            <a:r>
+              <a:rPr dirty="0"/>
+              <a:t> exploitation.</a:t>
             </a:r>
           </a:p>
         </p:txBody>
@@ -6083,4 +8391,265 @@
   </a:objectDefaults>
   <a:extraClrSchemeLst/>
 </a:theme>
+</file>
+
+<file path=ppt/theme/theme2.xml><?xml version="1.0" encoding="utf-8"?>
+<a:theme xmlns:a="http://schemas.openxmlformats.org/drawingml/2006/main" name="Office Theme">
+  <a:themeElements>
+    <a:clrScheme name="Office">
+      <a:dk1>
+        <a:sysClr val="windowText" lastClr="000000"/>
+      </a:dk1>
+      <a:lt1>
+        <a:sysClr val="window" lastClr="FFFFFF"/>
+      </a:lt1>
+      <a:dk2>
+        <a:srgbClr val="44546A"/>
+      </a:dk2>
+      <a:lt2>
+        <a:srgbClr val="E7E6E6"/>
+      </a:lt2>
+      <a:accent1>
+        <a:srgbClr val="5B9BD5"/>
+      </a:accent1>
+      <a:accent2>
+        <a:srgbClr val="ED7D31"/>
+      </a:accent2>
+      <a:accent3>
+        <a:srgbClr val="A5A5A5"/>
+      </a:accent3>
+      <a:accent4>
+        <a:srgbClr val="FFC000"/>
+      </a:accent4>
+      <a:accent5>
+        <a:srgbClr val="4472C4"/>
+      </a:accent5>
+      <a:accent6>
+        <a:srgbClr val="70AD47"/>
+      </a:accent6>
+      <a:hlink>
+        <a:srgbClr val="0563C1"/>
+      </a:hlink>
+      <a:folHlink>
+        <a:srgbClr val="954F72"/>
+      </a:folHlink>
+    </a:clrScheme>
+    <a:fontScheme name="Office">
+      <a:majorFont>
+        <a:latin typeface="Calibri Light" panose="020F0302020204030204"/>
+        <a:ea typeface=""/>
+        <a:cs typeface=""/>
+        <a:font script="Jpan" typeface="ＭＳ Ｐゴシック"/>
+        <a:font script="Hang" typeface="맑은 고딕"/>
+        <a:font script="Hans" typeface="宋体"/>
+        <a:font script="Hant" typeface="新細明體"/>
+        <a:font script="Arab" typeface="Times New Roman"/>
+        <a:font script="Hebr" typeface="Times New Roman"/>
+        <a:font script="Thai" typeface="Angsana New"/>
+        <a:font script="Ethi" typeface="Nyala"/>
+        <a:font script="Beng" typeface="Vrinda"/>
+        <a:font script="Gujr" typeface="Shruti"/>
+        <a:font script="Khmr" typeface="MoolBoran"/>
+        <a:font script="Knda" typeface="Tunga"/>
+        <a:font script="Guru" typeface="Raavi"/>
+        <a:font script="Cans" typeface="Euphemia"/>
+        <a:font script="Cher" typeface="Plantagenet Cherokee"/>
+        <a:font script="Yiii" typeface="Microsoft Yi Baiti"/>
+        <a:font script="Tibt" typeface="Microsoft Himalaya"/>
+        <a:font script="Thaa" typeface="MV Boli"/>
+        <a:font script="Deva" typeface="Mangal"/>
+        <a:font script="Telu" typeface="Gautami"/>
+        <a:font script="Taml" typeface="Latha"/>
+        <a:font script="Syrc" typeface="Estrangelo Edessa"/>
+        <a:font script="Orya" typeface="Kalinga"/>
+        <a:font script="Mlym" typeface="Kartika"/>
+        <a:font script="Laoo" typeface="DokChampa"/>
+        <a:font script="Sinh" typeface="Iskoola Pota"/>
+        <a:font script="Mong" typeface="Mongolian Baiti"/>
+        <a:font script="Viet" typeface="Times New Roman"/>
+        <a:font script="Uigh" typeface="Microsoft Uighur"/>
+        <a:font script="Geor" typeface="Sylfaen"/>
+      </a:majorFont>
+      <a:minorFont>
+        <a:latin typeface="Calibri" panose="020F0502020204030204"/>
+        <a:ea typeface=""/>
+        <a:cs typeface=""/>
+        <a:font script="Jpan" typeface="ＭＳ Ｐゴシック"/>
+        <a:font script="Hang" typeface="맑은 고딕"/>
+        <a:font script="Hans" typeface="宋体"/>
+        <a:font script="Hant" typeface="新細明體"/>
+        <a:font script="Arab" typeface="Arial"/>
+        <a:font script="Hebr" typeface="Arial"/>
+        <a:font script="Thai" typeface="Cordia New"/>
+        <a:font script="Ethi" typeface="Nyala"/>
+        <a:font script="Beng" typeface="Vrinda"/>
+        <a:font script="Gujr" typeface="Shruti"/>
+        <a:font script="Khmr" typeface="DaunPenh"/>
+        <a:font script="Knda" typeface="Tunga"/>
+        <a:font script="Guru" typeface="Raavi"/>
+        <a:font script="Cans" typeface="Euphemia"/>
+        <a:font script="Cher" typeface="Plantagenet Cherokee"/>
+        <a:font script="Yiii" typeface="Microsoft Yi Baiti"/>
+        <a:font script="Tibt" typeface="Microsoft Himalaya"/>
+        <a:font script="Thaa" typeface="MV Boli"/>
+        <a:font script="Deva" typeface="Mangal"/>
+        <a:font script="Telu" typeface="Gautami"/>
+        <a:font script="Taml" typeface="Latha"/>
+        <a:font script="Syrc" typeface="Estrangelo Edessa"/>
+        <a:font script="Orya" typeface="Kalinga"/>
+        <a:font script="Mlym" typeface="Kartika"/>
+        <a:font script="Laoo" typeface="DokChampa"/>
+        <a:font script="Sinh" typeface="Iskoola Pota"/>
+        <a:font script="Mong" typeface="Mongolian Baiti"/>
+        <a:font script="Viet" typeface="Arial"/>
+        <a:font script="Uigh" typeface="Microsoft Uighur"/>
+        <a:font script="Geor" typeface="Sylfaen"/>
+      </a:minorFont>
+    </a:fontScheme>
+    <a:fmtScheme name="Office">
+      <a:fillStyleLst>
+        <a:solidFill>
+          <a:schemeClr val="phClr"/>
+        </a:solidFill>
+        <a:gradFill rotWithShape="1">
+          <a:gsLst>
+            <a:gs pos="0">
+              <a:schemeClr val="phClr">
+                <a:lumMod val="110000"/>
+                <a:satMod val="105000"/>
+                <a:tint val="67000"/>
+              </a:schemeClr>
+            </a:gs>
+            <a:gs pos="50000">
+              <a:schemeClr val="phClr">
+                <a:lumMod val="105000"/>
+                <a:satMod val="103000"/>
+                <a:tint val="73000"/>
+              </a:schemeClr>
+            </a:gs>
+            <a:gs pos="100000">
+              <a:schemeClr val="phClr">
+                <a:lumMod val="105000"/>
+                <a:satMod val="109000"/>
+                <a:tint val="81000"/>
+              </a:schemeClr>
+            </a:gs>
+          </a:gsLst>
+          <a:lin ang="5400000" scaled="0"/>
+        </a:gradFill>
+        <a:gradFill rotWithShape="1">
+          <a:gsLst>
+            <a:gs pos="0">
+              <a:schemeClr val="phClr">
+                <a:satMod val="103000"/>
+                <a:lumMod val="102000"/>
+                <a:tint val="94000"/>
+              </a:schemeClr>
+            </a:gs>
+            <a:gs pos="50000">
+              <a:schemeClr val="phClr">
+                <a:satMod val="110000"/>
+                <a:lumMod val="100000"/>
+                <a:shade val="100000"/>
+              </a:schemeClr>
+            </a:gs>
+            <a:gs pos="100000">
+              <a:schemeClr val="phClr">
+                <a:lumMod val="99000"/>
+                <a:satMod val="120000"/>
+                <a:shade val="78000"/>
+              </a:schemeClr>
+            </a:gs>
+          </a:gsLst>
+          <a:lin ang="5400000" scaled="0"/>
+        </a:gradFill>
+      </a:fillStyleLst>
+      <a:lnStyleLst>
+        <a:ln w="6350" cap="flat" cmpd="sng" algn="ctr">
+          <a:solidFill>
+            <a:schemeClr val="phClr"/>
+          </a:solidFill>
+          <a:prstDash val="solid"/>
+          <a:miter lim="800000"/>
+        </a:ln>
+        <a:ln w="12700" cap="flat" cmpd="sng" algn="ctr">
+          <a:solidFill>
+            <a:schemeClr val="phClr"/>
+          </a:solidFill>
+          <a:prstDash val="solid"/>
+          <a:miter lim="800000"/>
+        </a:ln>
+        <a:ln w="19050" cap="flat" cmpd="sng" algn="ctr">
+          <a:solidFill>
+            <a:schemeClr val="phClr"/>
+          </a:solidFill>
+          <a:prstDash val="solid"/>
+          <a:miter lim="800000"/>
+        </a:ln>
+      </a:lnStyleLst>
+      <a:effectStyleLst>
+        <a:effectStyle>
+          <a:effectLst/>
+        </a:effectStyle>
+        <a:effectStyle>
+          <a:effectLst/>
+        </a:effectStyle>
+        <a:effectStyle>
+          <a:effectLst>
+            <a:outerShdw blurRad="57150" dist="19050" dir="5400000" algn="ctr" rotWithShape="0">
+              <a:srgbClr val="000000">
+                <a:alpha val="63000"/>
+              </a:srgbClr>
+            </a:outerShdw>
+          </a:effectLst>
+        </a:effectStyle>
+      </a:effectStyleLst>
+      <a:bgFillStyleLst>
+        <a:solidFill>
+          <a:schemeClr val="phClr"/>
+        </a:solidFill>
+        <a:solidFill>
+          <a:schemeClr val="phClr">
+            <a:tint val="95000"/>
+            <a:satMod val="170000"/>
+          </a:schemeClr>
+        </a:solidFill>
+        <a:gradFill rotWithShape="1">
+          <a:gsLst>
+            <a:gs pos="0">
+              <a:schemeClr val="phClr">
+                <a:tint val="93000"/>
+                <a:satMod val="150000"/>
+                <a:shade val="98000"/>
+                <a:lumMod val="102000"/>
+              </a:schemeClr>
+            </a:gs>
+            <a:gs pos="50000">
+              <a:schemeClr val="phClr">
+                <a:tint val="98000"/>
+                <a:satMod val="130000"/>
+                <a:shade val="90000"/>
+                <a:lumMod val="103000"/>
+              </a:schemeClr>
+            </a:gs>
+            <a:gs pos="100000">
+              <a:schemeClr val="phClr">
+                <a:shade val="63000"/>
+                <a:satMod val="120000"/>
+              </a:schemeClr>
+            </a:gs>
+          </a:gsLst>
+          <a:lin ang="5400000" scaled="0"/>
+        </a:gradFill>
+      </a:bgFillStyleLst>
+    </a:fmtScheme>
+  </a:themeElements>
+  <a:objectDefaults/>
+  <a:extraClrSchemeLst/>
+  <a:extLst>
+    <a:ext uri="{05A4C25C-085E-4340-85A3-A5531E510DB2}">
+      <thm15:themeFamily xmlns:thm15="http://schemas.microsoft.com/office/thememl/2012/main" name="Office Theme" id="{62F939B6-93AF-4DB8-9C6B-D6C7DFDC589F}" vid="{4A3C46E8-61CC-4603-A589-7422A47A8E4A}"/>
+    </a:ext>
+  </a:extLst>
+</a:theme>
 </file>